--- a/participant-setup/presentations/ppts/TECH-SETUP.pptx
+++ b/participant-setup/presentations/ppts/TECH-SETUP.pptx
@@ -5,7 +5,7 @@
     <p:sldMasterId id="2147483648" r:id="rId1"/>
   </p:sldMasterIdLst>
   <p:notesMasterIdLst>
-    <p:notesMasterId r:id="rId16"/>
+    <p:notesMasterId r:id="rId27"/>
   </p:notesMasterIdLst>
   <p:sldIdLst>
     <p:sldId id="256" r:id="rId2"/>
@@ -22,6 +22,17 @@
     <p:sldId id="267" r:id="rId13"/>
     <p:sldId id="268" r:id="rId14"/>
     <p:sldId id="269" r:id="rId15"/>
+    <p:sldId id="270" r:id="rId16"/>
+    <p:sldId id="271" r:id="rId17"/>
+    <p:sldId id="272" r:id="rId18"/>
+    <p:sldId id="273" r:id="rId19"/>
+    <p:sldId id="274" r:id="rId20"/>
+    <p:sldId id="275" r:id="rId21"/>
+    <p:sldId id="276" r:id="rId22"/>
+    <p:sldId id="277" r:id="rId23"/>
+    <p:sldId id="278" r:id="rId24"/>
+    <p:sldId id="279" r:id="rId25"/>
+    <p:sldId id="280" r:id="rId26"/>
   </p:sldIdLst>
   <p:sldSz cx="9144000" cy="5143500" type="screen16x9"/>
   <p:notesSz cx="6858000" cy="9144000"/>
@@ -570,6 +581,826 @@
 </p:notes>
 </file>
 
+<file path=ppt/notesSlides/notesSlide10.xml><?xml version="1.0" encoding="utf-8"?>
+<p:notes xmlns:a="http://schemas.openxmlformats.org/drawingml/2006/main" xmlns:r="http://schemas.openxmlformats.org/officeDocument/2006/relationships" xmlns:p="http://schemas.openxmlformats.org/presentationml/2006/main">
+  <p:cSld>
+    <p:spTree>
+      <p:nvGrpSpPr>
+        <p:cNvPr id="1" name=""/>
+        <p:cNvGrpSpPr/>
+        <p:nvPr/>
+      </p:nvGrpSpPr>
+      <p:grpSpPr>
+        <a:xfrm>
+          <a:off x="0" y="0"/>
+          <a:ext cx="0" cy="0"/>
+          <a:chOff x="0" y="0"/>
+          <a:chExt cx="0" cy="0"/>
+        </a:xfrm>
+      </p:grpSpPr>
+      <p:sp>
+        <p:nvSpPr>
+          <p:cNvPr id="2" name="Slide Image Placeholder 1"/>
+          <p:cNvSpPr>
+            <a:spLocks noGrp="1" noRot="1" noChangeAspect="1"/>
+          </p:cNvSpPr>
+          <p:nvPr>
+            <p:ph type="sldImg"/>
+          </p:nvPr>
+        </p:nvSpPr>
+        <p:spPr/>
+      </p:sp>
+      <p:sp>
+        <p:nvSpPr>
+          <p:cNvPr id="3" name="Notes Placeholder 2"/>
+          <p:cNvSpPr>
+            <a:spLocks noGrp="1"/>
+          </p:cNvSpPr>
+          <p:nvPr>
+            <p:ph type="body" idx="1"/>
+          </p:nvPr>
+        </p:nvSpPr>
+        <p:spPr/>
+        <p:txBody>
+          <a:bodyPr/>
+          <a:lstStyle/>
+          <a:p>
+            <a:pPr lvl="0" indent="0" marL="0">
+              <a:buNone/>
+            </a:pPr>
+            <a:r>
+              <a:rPr/>
+              <a:t>Don’t mandate an editor. Anyone already fluent in one should keep it — the goal is comfort with markdown, not a specific tool.</a:t>
+            </a:r>
+          </a:p>
+        </p:txBody>
+      </p:sp>
+      <p:sp>
+        <p:nvSpPr>
+          <p:cNvPr id="4" name="Slide Number Placeholder 3"/>
+          <p:cNvSpPr>
+            <a:spLocks noGrp="1"/>
+          </p:cNvSpPr>
+          <p:nvPr>
+            <p:ph type="sldNum" sz="quarter" idx="10"/>
+          </p:nvPr>
+        </p:nvSpPr>
+        <p:spPr/>
+        <p:txBody>
+          <a:bodyPr/>
+          <a:lstStyle/>
+          <a:p>
+            <a:fld id="{18BDFEC3-8487-43E8-A154-7C12CBC1FFF2}" type="slidenum">
+              <a:rPr lang="en-US"/>
+              <a:t>13</a:t>
+            </a:fld>
+            <a:endParaRPr lang="en-US"/>
+          </a:p>
+        </p:txBody>
+      </p:sp>
+    </p:spTree>
+  </p:cSld>
+</p:notes>
+</file>
+
+<file path=ppt/notesSlides/notesSlide11.xml><?xml version="1.0" encoding="utf-8"?>
+<p:notes xmlns:a="http://schemas.openxmlformats.org/drawingml/2006/main" xmlns:r="http://schemas.openxmlformats.org/officeDocument/2006/relationships" xmlns:p="http://schemas.openxmlformats.org/presentationml/2006/main">
+  <p:cSld>
+    <p:spTree>
+      <p:nvGrpSpPr>
+        <p:cNvPr id="1" name=""/>
+        <p:cNvGrpSpPr/>
+        <p:nvPr/>
+      </p:nvGrpSpPr>
+      <p:grpSpPr>
+        <a:xfrm>
+          <a:off x="0" y="0"/>
+          <a:ext cx="0" cy="0"/>
+          <a:chOff x="0" y="0"/>
+          <a:chExt cx="0" cy="0"/>
+        </a:xfrm>
+      </p:grpSpPr>
+      <p:sp>
+        <p:nvSpPr>
+          <p:cNvPr id="2" name="Slide Image Placeholder 1"/>
+          <p:cNvSpPr>
+            <a:spLocks noGrp="1" noRot="1" noChangeAspect="1"/>
+          </p:cNvSpPr>
+          <p:nvPr>
+            <p:ph type="sldImg"/>
+          </p:nvPr>
+        </p:nvSpPr>
+        <p:spPr/>
+      </p:sp>
+      <p:sp>
+        <p:nvSpPr>
+          <p:cNvPr id="3" name="Notes Placeholder 2"/>
+          <p:cNvSpPr>
+            <a:spLocks noGrp="1"/>
+          </p:cNvSpPr>
+          <p:nvPr>
+            <p:ph type="body" idx="1"/>
+          </p:nvPr>
+        </p:nvSpPr>
+        <p:spPr/>
+        <p:txBody>
+          <a:bodyPr/>
+          <a:lstStyle/>
+          <a:p>
+            <a:pPr lvl="0" indent="0" marL="0">
+              <a:buNone/>
+            </a:pPr>
+            <a:r>
+              <a:rPr/>
+              <a:t>Week 2 Day 3 needs one shared SaaS product cohort-wide — pick it and put the URL on a slide before Monday.</a:t>
+            </a:r>
+          </a:p>
+        </p:txBody>
+      </p:sp>
+      <p:sp>
+        <p:nvSpPr>
+          <p:cNvPr id="4" name="Slide Number Placeholder 3"/>
+          <p:cNvSpPr>
+            <a:spLocks noGrp="1"/>
+          </p:cNvSpPr>
+          <p:nvPr>
+            <p:ph type="sldNum" sz="quarter" idx="10"/>
+          </p:nvPr>
+        </p:nvSpPr>
+        <p:spPr/>
+        <p:txBody>
+          <a:bodyPr/>
+          <a:lstStyle/>
+          <a:p>
+            <a:fld id="{18BDFEC3-8487-43E8-A154-7C12CBC1FFF2}" type="slidenum">
+              <a:rPr lang="en-US"/>
+              <a:t>14</a:t>
+            </a:fld>
+            <a:endParaRPr lang="en-US"/>
+          </a:p>
+        </p:txBody>
+      </p:sp>
+    </p:spTree>
+  </p:cSld>
+</p:notes>
+</file>
+
+<file path=ppt/notesSlides/notesSlide12.xml><?xml version="1.0" encoding="utf-8"?>
+<p:notes xmlns:a="http://schemas.openxmlformats.org/drawingml/2006/main" xmlns:r="http://schemas.openxmlformats.org/officeDocument/2006/relationships" xmlns:p="http://schemas.openxmlformats.org/presentationml/2006/main">
+  <p:cSld>
+    <p:spTree>
+      <p:nvGrpSpPr>
+        <p:cNvPr id="1" name=""/>
+        <p:cNvGrpSpPr/>
+        <p:nvPr/>
+      </p:nvGrpSpPr>
+      <p:grpSpPr>
+        <a:xfrm>
+          <a:off x="0" y="0"/>
+          <a:ext cx="0" cy="0"/>
+          <a:chOff x="0" y="0"/>
+          <a:chExt cx="0" cy="0"/>
+        </a:xfrm>
+      </p:grpSpPr>
+      <p:sp>
+        <p:nvSpPr>
+          <p:cNvPr id="2" name="Slide Image Placeholder 1"/>
+          <p:cNvSpPr>
+            <a:spLocks noGrp="1" noRot="1" noChangeAspect="1"/>
+          </p:cNvSpPr>
+          <p:nvPr>
+            <p:ph type="sldImg"/>
+          </p:nvPr>
+        </p:nvSpPr>
+        <p:spPr/>
+      </p:sp>
+      <p:sp>
+        <p:nvSpPr>
+          <p:cNvPr id="3" name="Notes Placeholder 2"/>
+          <p:cNvSpPr>
+            <a:spLocks noGrp="1"/>
+          </p:cNvSpPr>
+          <p:nvPr>
+            <p:ph type="body" idx="1"/>
+          </p:nvPr>
+        </p:nvSpPr>
+        <p:spPr/>
+        <p:txBody>
+          <a:bodyPr/>
+          <a:lstStyle/>
+          <a:p>
+            <a:pPr lvl="0" indent="0" marL="0">
+              <a:buNone/>
+            </a:pPr>
+            <a:r>
+              <a:rPr/>
+              <a:t>Re-read this section the Friday before each week begins. Week 3’s “AI off” needs saying out loud — it fails silently if people leave editor AI on.</a:t>
+            </a:r>
+          </a:p>
+        </p:txBody>
+      </p:sp>
+      <p:sp>
+        <p:nvSpPr>
+          <p:cNvPr id="4" name="Slide Number Placeholder 3"/>
+          <p:cNvSpPr>
+            <a:spLocks noGrp="1"/>
+          </p:cNvSpPr>
+          <p:nvPr>
+            <p:ph type="sldNum" sz="quarter" idx="10"/>
+          </p:nvPr>
+        </p:nvSpPr>
+        <p:spPr/>
+        <p:txBody>
+          <a:bodyPr/>
+          <a:lstStyle/>
+          <a:p>
+            <a:fld id="{18BDFEC3-8487-43E8-A154-7C12CBC1FFF2}" type="slidenum">
+              <a:rPr lang="en-US"/>
+              <a:t>15</a:t>
+            </a:fld>
+            <a:endParaRPr lang="en-US"/>
+          </a:p>
+        </p:txBody>
+      </p:sp>
+    </p:spTree>
+  </p:cSld>
+</p:notes>
+</file>
+
+<file path=ppt/notesSlides/notesSlide13.xml><?xml version="1.0" encoding="utf-8"?>
+<p:notes xmlns:a="http://schemas.openxmlformats.org/drawingml/2006/main" xmlns:r="http://schemas.openxmlformats.org/officeDocument/2006/relationships" xmlns:p="http://schemas.openxmlformats.org/presentationml/2006/main">
+  <p:cSld>
+    <p:spTree>
+      <p:nvGrpSpPr>
+        <p:cNvPr id="1" name=""/>
+        <p:cNvGrpSpPr/>
+        <p:nvPr/>
+      </p:nvGrpSpPr>
+      <p:grpSpPr>
+        <a:xfrm>
+          <a:off x="0" y="0"/>
+          <a:ext cx="0" cy="0"/>
+          <a:chOff x="0" y="0"/>
+          <a:chExt cx="0" cy="0"/>
+        </a:xfrm>
+      </p:grpSpPr>
+      <p:sp>
+        <p:nvSpPr>
+          <p:cNvPr id="2" name="Slide Image Placeholder 1"/>
+          <p:cNvSpPr>
+            <a:spLocks noGrp="1" noRot="1" noChangeAspect="1"/>
+          </p:cNvSpPr>
+          <p:nvPr>
+            <p:ph type="sldImg"/>
+          </p:nvPr>
+        </p:nvSpPr>
+        <p:spPr/>
+      </p:sp>
+      <p:sp>
+        <p:nvSpPr>
+          <p:cNvPr id="3" name="Notes Placeholder 2"/>
+          <p:cNvSpPr>
+            <a:spLocks noGrp="1"/>
+          </p:cNvSpPr>
+          <p:nvPr>
+            <p:ph type="body" idx="1"/>
+          </p:nvPr>
+        </p:nvSpPr>
+        <p:spPr/>
+        <p:txBody>
+          <a:bodyPr/>
+          <a:lstStyle/>
+          <a:p>
+            <a:pPr lvl="0" indent="0" marL="0">
+              <a:buNone/>
+            </a:pPr>
+            <a:r>
+              <a:rPr/>
+              <a:t>Week 6’s role-play handouts are instructor-prepared — print them before Monday, not during the block.</a:t>
+            </a:r>
+          </a:p>
+        </p:txBody>
+      </p:sp>
+      <p:sp>
+        <p:nvSpPr>
+          <p:cNvPr id="4" name="Slide Number Placeholder 3"/>
+          <p:cNvSpPr>
+            <a:spLocks noGrp="1"/>
+          </p:cNvSpPr>
+          <p:nvPr>
+            <p:ph type="sldNum" sz="quarter" idx="10"/>
+          </p:nvPr>
+        </p:nvSpPr>
+        <p:spPr/>
+        <p:txBody>
+          <a:bodyPr/>
+          <a:lstStyle/>
+          <a:p>
+            <a:fld id="{18BDFEC3-8487-43E8-A154-7C12CBC1FFF2}" type="slidenum">
+              <a:rPr lang="en-US"/>
+              <a:t>16</a:t>
+            </a:fld>
+            <a:endParaRPr lang="en-US"/>
+          </a:p>
+        </p:txBody>
+      </p:sp>
+    </p:spTree>
+  </p:cSld>
+</p:notes>
+</file>
+
+<file path=ppt/notesSlides/notesSlide14.xml><?xml version="1.0" encoding="utf-8"?>
+<p:notes xmlns:a="http://schemas.openxmlformats.org/drawingml/2006/main" xmlns:r="http://schemas.openxmlformats.org/officeDocument/2006/relationships" xmlns:p="http://schemas.openxmlformats.org/presentationml/2006/main">
+  <p:cSld>
+    <p:spTree>
+      <p:nvGrpSpPr>
+        <p:cNvPr id="1" name=""/>
+        <p:cNvGrpSpPr/>
+        <p:nvPr/>
+      </p:nvGrpSpPr>
+      <p:grpSpPr>
+        <a:xfrm>
+          <a:off x="0" y="0"/>
+          <a:ext cx="0" cy="0"/>
+          <a:chOff x="0" y="0"/>
+          <a:chExt cx="0" cy="0"/>
+        </a:xfrm>
+      </p:grpSpPr>
+      <p:sp>
+        <p:nvSpPr>
+          <p:cNvPr id="2" name="Slide Image Placeholder 1"/>
+          <p:cNvSpPr>
+            <a:spLocks noGrp="1" noRot="1" noChangeAspect="1"/>
+          </p:cNvSpPr>
+          <p:nvPr>
+            <p:ph type="sldImg"/>
+          </p:nvPr>
+        </p:nvSpPr>
+        <p:spPr/>
+      </p:sp>
+      <p:sp>
+        <p:nvSpPr>
+          <p:cNvPr id="3" name="Notes Placeholder 2"/>
+          <p:cNvSpPr>
+            <a:spLocks noGrp="1"/>
+          </p:cNvSpPr>
+          <p:nvPr>
+            <p:ph type="body" idx="1"/>
+          </p:nvPr>
+        </p:nvSpPr>
+        <p:spPr/>
+        <p:txBody>
+          <a:bodyPr/>
+          <a:lstStyle/>
+          <a:p>
+            <a:pPr lvl="0" indent="0" marL="0">
+              <a:buNone/>
+            </a:pPr>
+            <a:r>
+              <a:rPr/>
+              <a:t>Weeks 7 and 8 each have setup steps that fail loudly if skipped — ADO access and post-assessment logins. Both need lead time.</a:t>
+            </a:r>
+          </a:p>
+        </p:txBody>
+      </p:sp>
+      <p:sp>
+        <p:nvSpPr>
+          <p:cNvPr id="4" name="Slide Number Placeholder 3"/>
+          <p:cNvSpPr>
+            <a:spLocks noGrp="1"/>
+          </p:cNvSpPr>
+          <p:nvPr>
+            <p:ph type="sldNum" sz="quarter" idx="10"/>
+          </p:nvPr>
+        </p:nvSpPr>
+        <p:spPr/>
+        <p:txBody>
+          <a:bodyPr/>
+          <a:lstStyle/>
+          <a:p>
+            <a:fld id="{18BDFEC3-8487-43E8-A154-7C12CBC1FFF2}" type="slidenum">
+              <a:rPr lang="en-US"/>
+              <a:t>17</a:t>
+            </a:fld>
+            <a:endParaRPr lang="en-US"/>
+          </a:p>
+        </p:txBody>
+      </p:sp>
+    </p:spTree>
+  </p:cSld>
+</p:notes>
+</file>
+
+<file path=ppt/notesSlides/notesSlide15.xml><?xml version="1.0" encoding="utf-8"?>
+<p:notes xmlns:a="http://schemas.openxmlformats.org/drawingml/2006/main" xmlns:r="http://schemas.openxmlformats.org/officeDocument/2006/relationships" xmlns:p="http://schemas.openxmlformats.org/presentationml/2006/main">
+  <p:cSld>
+    <p:spTree>
+      <p:nvGrpSpPr>
+        <p:cNvPr id="1" name=""/>
+        <p:cNvGrpSpPr/>
+        <p:nvPr/>
+      </p:nvGrpSpPr>
+      <p:grpSpPr>
+        <a:xfrm>
+          <a:off x="0" y="0"/>
+          <a:ext cx="0" cy="0"/>
+          <a:chOff x="0" y="0"/>
+          <a:chExt cx="0" cy="0"/>
+        </a:xfrm>
+      </p:grpSpPr>
+      <p:sp>
+        <p:nvSpPr>
+          <p:cNvPr id="2" name="Slide Image Placeholder 1"/>
+          <p:cNvSpPr>
+            <a:spLocks noGrp="1" noRot="1" noChangeAspect="1"/>
+          </p:cNvSpPr>
+          <p:nvPr>
+            <p:ph type="sldImg"/>
+          </p:nvPr>
+        </p:nvSpPr>
+        <p:spPr/>
+      </p:sp>
+      <p:sp>
+        <p:nvSpPr>
+          <p:cNvPr id="3" name="Notes Placeholder 2"/>
+          <p:cNvSpPr>
+            <a:spLocks noGrp="1"/>
+          </p:cNvSpPr>
+          <p:nvPr>
+            <p:ph type="body" idx="1"/>
+          </p:nvPr>
+        </p:nvSpPr>
+        <p:spPr/>
+        <p:txBody>
+          <a:bodyPr/>
+          <a:lstStyle/>
+          <a:p>
+            <a:pPr lvl="0" indent="0" marL="0">
+              <a:buNone/>
+            </a:pPr>
+            <a:r>
+              <a:rPr/>
+              <a:t>The pre-flight checklist exists because most facilitation problems are setup problems. Run it the Friday before — leave Monday for content, not tooling.</a:t>
+            </a:r>
+          </a:p>
+        </p:txBody>
+      </p:sp>
+      <p:sp>
+        <p:nvSpPr>
+          <p:cNvPr id="4" name="Slide Number Placeholder 3"/>
+          <p:cNvSpPr>
+            <a:spLocks noGrp="1"/>
+          </p:cNvSpPr>
+          <p:nvPr>
+            <p:ph type="sldNum" sz="quarter" idx="10"/>
+          </p:nvPr>
+        </p:nvSpPr>
+        <p:spPr/>
+        <p:txBody>
+          <a:bodyPr/>
+          <a:lstStyle/>
+          <a:p>
+            <a:fld id="{18BDFEC3-8487-43E8-A154-7C12CBC1FFF2}" type="slidenum">
+              <a:rPr lang="en-US"/>
+              <a:t>18</a:t>
+            </a:fld>
+            <a:endParaRPr lang="en-US"/>
+          </a:p>
+        </p:txBody>
+      </p:sp>
+    </p:spTree>
+  </p:cSld>
+</p:notes>
+</file>
+
+<file path=ppt/notesSlides/notesSlide16.xml><?xml version="1.0" encoding="utf-8"?>
+<p:notes xmlns:a="http://schemas.openxmlformats.org/drawingml/2006/main" xmlns:r="http://schemas.openxmlformats.org/officeDocument/2006/relationships" xmlns:p="http://schemas.openxmlformats.org/presentationml/2006/main">
+  <p:cSld>
+    <p:spTree>
+      <p:nvGrpSpPr>
+        <p:cNvPr id="1" name=""/>
+        <p:cNvGrpSpPr/>
+        <p:nvPr/>
+      </p:nvGrpSpPr>
+      <p:grpSpPr>
+        <a:xfrm>
+          <a:off x="0" y="0"/>
+          <a:ext cx="0" cy="0"/>
+          <a:chOff x="0" y="0"/>
+          <a:chExt cx="0" cy="0"/>
+        </a:xfrm>
+      </p:grpSpPr>
+      <p:sp>
+        <p:nvSpPr>
+          <p:cNvPr id="2" name="Slide Image Placeholder 1"/>
+          <p:cNvSpPr>
+            <a:spLocks noGrp="1" noRot="1" noChangeAspect="1"/>
+          </p:cNvSpPr>
+          <p:nvPr>
+            <p:ph type="sldImg"/>
+          </p:nvPr>
+        </p:nvSpPr>
+        <p:spPr/>
+      </p:sp>
+      <p:sp>
+        <p:nvSpPr>
+          <p:cNvPr id="3" name="Notes Placeholder 2"/>
+          <p:cNvSpPr>
+            <a:spLocks noGrp="1"/>
+          </p:cNvSpPr>
+          <p:nvPr>
+            <p:ph type="body" idx="1"/>
+          </p:nvPr>
+        </p:nvSpPr>
+        <p:spPr/>
+        <p:txBody>
+          <a:bodyPr/>
+          <a:lstStyle/>
+          <a:p>
+            <a:pPr lvl="0" indent="0" marL="0">
+              <a:buNone/>
+            </a:pPr>
+            <a:r>
+              <a:rPr/>
+              <a:t>These two are called out separately because they have external dependencies (IT, the assessment vendor) and can’t be fixed the morning of.</a:t>
+            </a:r>
+          </a:p>
+        </p:txBody>
+      </p:sp>
+      <p:sp>
+        <p:nvSpPr>
+          <p:cNvPr id="4" name="Slide Number Placeholder 3"/>
+          <p:cNvSpPr>
+            <a:spLocks noGrp="1"/>
+          </p:cNvSpPr>
+          <p:nvPr>
+            <p:ph type="sldNum" sz="quarter" idx="10"/>
+          </p:nvPr>
+        </p:nvSpPr>
+        <p:spPr/>
+        <p:txBody>
+          <a:bodyPr/>
+          <a:lstStyle/>
+          <a:p>
+            <a:fld id="{18BDFEC3-8487-43E8-A154-7C12CBC1FFF2}" type="slidenum">
+              <a:rPr lang="en-US"/>
+              <a:t>19</a:t>
+            </a:fld>
+            <a:endParaRPr lang="en-US"/>
+          </a:p>
+        </p:txBody>
+      </p:sp>
+    </p:spTree>
+  </p:cSld>
+</p:notes>
+</file>
+
+<file path=ppt/notesSlides/notesSlide17.xml><?xml version="1.0" encoding="utf-8"?>
+<p:notes xmlns:a="http://schemas.openxmlformats.org/drawingml/2006/main" xmlns:r="http://schemas.openxmlformats.org/officeDocument/2006/relationships" xmlns:p="http://schemas.openxmlformats.org/presentationml/2006/main">
+  <p:cSld>
+    <p:spTree>
+      <p:nvGrpSpPr>
+        <p:cNvPr id="1" name=""/>
+        <p:cNvGrpSpPr/>
+        <p:nvPr/>
+      </p:nvGrpSpPr>
+      <p:grpSpPr>
+        <a:xfrm>
+          <a:off x="0" y="0"/>
+          <a:ext cx="0" cy="0"/>
+          <a:chOff x="0" y="0"/>
+          <a:chExt cx="0" cy="0"/>
+        </a:xfrm>
+      </p:grpSpPr>
+      <p:sp>
+        <p:nvSpPr>
+          <p:cNvPr id="2" name="Slide Image Placeholder 1"/>
+          <p:cNvSpPr>
+            <a:spLocks noGrp="1" noRot="1" noChangeAspect="1"/>
+          </p:cNvSpPr>
+          <p:nvPr>
+            <p:ph type="sldImg"/>
+          </p:nvPr>
+        </p:nvSpPr>
+        <p:spPr/>
+      </p:sp>
+      <p:sp>
+        <p:nvSpPr>
+          <p:cNvPr id="3" name="Notes Placeholder 2"/>
+          <p:cNvSpPr>
+            <a:spLocks noGrp="1"/>
+          </p:cNvSpPr>
+          <p:nvPr>
+            <p:ph type="body" idx="1"/>
+          </p:nvPr>
+        </p:nvSpPr>
+        <p:spPr/>
+        <p:txBody>
+          <a:bodyPr/>
+          <a:lstStyle/>
+          <a:p>
+            <a:pPr lvl="0" indent="0" marL="0">
+              <a:buNone/>
+            </a:pPr>
+            <a:r>
+              <a:rPr/>
+              <a:t>Stress that the academy continues when tools fail. The fallbacks are not “lesser” — they’re a different way to build the same muscle.</a:t>
+            </a:r>
+          </a:p>
+        </p:txBody>
+      </p:sp>
+      <p:sp>
+        <p:nvSpPr>
+          <p:cNvPr id="4" name="Slide Number Placeholder 3"/>
+          <p:cNvSpPr>
+            <a:spLocks noGrp="1"/>
+          </p:cNvSpPr>
+          <p:nvPr>
+            <p:ph type="sldNum" sz="quarter" idx="10"/>
+          </p:nvPr>
+        </p:nvSpPr>
+        <p:spPr/>
+        <p:txBody>
+          <a:bodyPr/>
+          <a:lstStyle/>
+          <a:p>
+            <a:fld id="{18BDFEC3-8487-43E8-A154-7C12CBC1FFF2}" type="slidenum">
+              <a:rPr lang="en-US"/>
+              <a:t>20</a:t>
+            </a:fld>
+            <a:endParaRPr lang="en-US"/>
+          </a:p>
+        </p:txBody>
+      </p:sp>
+    </p:spTree>
+  </p:cSld>
+</p:notes>
+</file>
+
+<file path=ppt/notesSlides/notesSlide18.xml><?xml version="1.0" encoding="utf-8"?>
+<p:notes xmlns:a="http://schemas.openxmlformats.org/drawingml/2006/main" xmlns:r="http://schemas.openxmlformats.org/officeDocument/2006/relationships" xmlns:p="http://schemas.openxmlformats.org/presentationml/2006/main">
+  <p:cSld>
+    <p:spTree>
+      <p:nvGrpSpPr>
+        <p:cNvPr id="1" name=""/>
+        <p:cNvGrpSpPr/>
+        <p:nvPr/>
+      </p:nvGrpSpPr>
+      <p:grpSpPr>
+        <a:xfrm>
+          <a:off x="0" y="0"/>
+          <a:ext cx="0" cy="0"/>
+          <a:chOff x="0" y="0"/>
+          <a:chExt cx="0" cy="0"/>
+        </a:xfrm>
+      </p:grpSpPr>
+      <p:sp>
+        <p:nvSpPr>
+          <p:cNvPr id="2" name="Slide Image Placeholder 1"/>
+          <p:cNvSpPr>
+            <a:spLocks noGrp="1" noRot="1" noChangeAspect="1"/>
+          </p:cNvSpPr>
+          <p:nvPr>
+            <p:ph type="sldImg"/>
+          </p:nvPr>
+        </p:nvSpPr>
+        <p:spPr/>
+      </p:sp>
+      <p:sp>
+        <p:nvSpPr>
+          <p:cNvPr id="3" name="Notes Placeholder 2"/>
+          <p:cNvSpPr>
+            <a:spLocks noGrp="1"/>
+          </p:cNvSpPr>
+          <p:nvPr>
+            <p:ph type="body" idx="1"/>
+          </p:nvPr>
+        </p:nvSpPr>
+        <p:spPr/>
+        <p:txBody>
+          <a:bodyPr/>
+          <a:lstStyle/>
+          <a:p>
+            <a:pPr lvl="0" indent="0" marL="0">
+              <a:buNone/>
+            </a:pPr>
+            <a:r>
+              <a:rPr/>
+              <a:t>The ADO-on-paper fallback loses hands-on practice but keeps the concepts. Say that trade-off out loud rather than pretending nothing was lost.</a:t>
+            </a:r>
+          </a:p>
+        </p:txBody>
+      </p:sp>
+      <p:sp>
+        <p:nvSpPr>
+          <p:cNvPr id="4" name="Slide Number Placeholder 3"/>
+          <p:cNvSpPr>
+            <a:spLocks noGrp="1"/>
+          </p:cNvSpPr>
+          <p:nvPr>
+            <p:ph type="sldNum" sz="quarter" idx="10"/>
+          </p:nvPr>
+        </p:nvSpPr>
+        <p:spPr/>
+        <p:txBody>
+          <a:bodyPr/>
+          <a:lstStyle/>
+          <a:p>
+            <a:fld id="{18BDFEC3-8487-43E8-A154-7C12CBC1FFF2}" type="slidenum">
+              <a:rPr lang="en-US"/>
+              <a:t>22</a:t>
+            </a:fld>
+            <a:endParaRPr lang="en-US"/>
+          </a:p>
+        </p:txBody>
+      </p:sp>
+    </p:spTree>
+  </p:cSld>
+</p:notes>
+</file>
+
+<file path=ppt/notesSlides/notesSlide19.xml><?xml version="1.0" encoding="utf-8"?>
+<p:notes xmlns:a="http://schemas.openxmlformats.org/drawingml/2006/main" xmlns:r="http://schemas.openxmlformats.org/officeDocument/2006/relationships" xmlns:p="http://schemas.openxmlformats.org/presentationml/2006/main">
+  <p:cSld>
+    <p:spTree>
+      <p:nvGrpSpPr>
+        <p:cNvPr id="1" name=""/>
+        <p:cNvGrpSpPr/>
+        <p:nvPr/>
+      </p:nvGrpSpPr>
+      <p:grpSpPr>
+        <a:xfrm>
+          <a:off x="0" y="0"/>
+          <a:ext cx="0" cy="0"/>
+          <a:chOff x="0" y="0"/>
+          <a:chExt cx="0" cy="0"/>
+        </a:xfrm>
+      </p:grpSpPr>
+      <p:sp>
+        <p:nvSpPr>
+          <p:cNvPr id="2" name="Slide Image Placeholder 1"/>
+          <p:cNvSpPr>
+            <a:spLocks noGrp="1" noRot="1" noChangeAspect="1"/>
+          </p:cNvSpPr>
+          <p:nvPr>
+            <p:ph type="sldImg"/>
+          </p:nvPr>
+        </p:nvSpPr>
+        <p:spPr/>
+      </p:sp>
+      <p:sp>
+        <p:nvSpPr>
+          <p:cNvPr id="3" name="Notes Placeholder 2"/>
+          <p:cNvSpPr>
+            <a:spLocks noGrp="1"/>
+          </p:cNvSpPr>
+          <p:nvPr>
+            <p:ph type="body" idx="1"/>
+          </p:nvPr>
+        </p:nvSpPr>
+        <p:spPr/>
+        <p:txBody>
+          <a:bodyPr/>
+          <a:lstStyle/>
+          <a:p>
+            <a:pPr lvl="0" indent="0" marL="0">
+              <a:buNone/>
+            </a:pPr>
+            <a:r>
+              <a:rPr/>
+              <a:t>Most of these issues are predictable. Keep the fixes within reach so facilitators don’t troubleshoot during teaching time.</a:t>
+            </a:r>
+          </a:p>
+        </p:txBody>
+      </p:sp>
+      <p:sp>
+        <p:nvSpPr>
+          <p:cNvPr id="4" name="Slide Number Placeholder 3"/>
+          <p:cNvSpPr>
+            <a:spLocks noGrp="1"/>
+          </p:cNvSpPr>
+          <p:nvPr>
+            <p:ph type="sldNum" sz="quarter" idx="10"/>
+          </p:nvPr>
+        </p:nvSpPr>
+        <p:spPr/>
+        <p:txBody>
+          <a:bodyPr/>
+          <a:lstStyle/>
+          <a:p>
+            <a:fld id="{18BDFEC3-8487-43E8-A154-7C12CBC1FFF2}" type="slidenum">
+              <a:rPr lang="en-US"/>
+              <a:t>23</a:t>
+            </a:fld>
+            <a:endParaRPr lang="en-US"/>
+          </a:p>
+        </p:txBody>
+      </p:sp>
+    </p:spTree>
+  </p:cSld>
+</p:notes>
+</file>
+
 <file path=ppt/notesSlides/notesSlide2.xml><?xml version="1.0" encoding="utf-8"?>
 <p:notes xmlns:a="http://schemas.openxmlformats.org/drawingml/2006/main" xmlns:r="http://schemas.openxmlformats.org/officeDocument/2006/relationships" xmlns:p="http://schemas.openxmlformats.org/presentationml/2006/main">
   <p:cSld>
@@ -642,6 +1473,170 @@
             <a:fld id="{18BDFEC3-8487-43E8-A154-7C12CBC1FFF2}" type="slidenum">
               <a:rPr lang="en-US"/>
               <a:t>5</a:t>
+            </a:fld>
+            <a:endParaRPr lang="en-US"/>
+          </a:p>
+        </p:txBody>
+      </p:sp>
+    </p:spTree>
+  </p:cSld>
+</p:notes>
+</file>
+
+<file path=ppt/notesSlides/notesSlide20.xml><?xml version="1.0" encoding="utf-8"?>
+<p:notes xmlns:a="http://schemas.openxmlformats.org/drawingml/2006/main" xmlns:r="http://schemas.openxmlformats.org/officeDocument/2006/relationships" xmlns:p="http://schemas.openxmlformats.org/presentationml/2006/main">
+  <p:cSld>
+    <p:spTree>
+      <p:nvGrpSpPr>
+        <p:cNvPr id="1" name=""/>
+        <p:cNvGrpSpPr/>
+        <p:nvPr/>
+      </p:nvGrpSpPr>
+      <p:grpSpPr>
+        <a:xfrm>
+          <a:off x="0" y="0"/>
+          <a:ext cx="0" cy="0"/>
+          <a:chOff x="0" y="0"/>
+          <a:chExt cx="0" cy="0"/>
+        </a:xfrm>
+      </p:grpSpPr>
+      <p:sp>
+        <p:nvSpPr>
+          <p:cNvPr id="2" name="Slide Image Placeholder 1"/>
+          <p:cNvSpPr>
+            <a:spLocks noGrp="1" noRot="1" noChangeAspect="1"/>
+          </p:cNvSpPr>
+          <p:nvPr>
+            <p:ph type="sldImg"/>
+          </p:nvPr>
+        </p:nvSpPr>
+        <p:spPr/>
+      </p:sp>
+      <p:sp>
+        <p:nvSpPr>
+          <p:cNvPr id="3" name="Notes Placeholder 2"/>
+          <p:cNvSpPr>
+            <a:spLocks noGrp="1"/>
+          </p:cNvSpPr>
+          <p:nvPr>
+            <p:ph type="body" idx="1"/>
+          </p:nvPr>
+        </p:nvSpPr>
+        <p:spPr/>
+        <p:txBody>
+          <a:bodyPr/>
+          <a:lstStyle/>
+          <a:p>
+            <a:pPr lvl="0" indent="0" marL="0">
+              <a:buNone/>
+            </a:pPr>
+            <a:r>
+              <a:rPr/>
+              <a:t>Customize the bracketed placeholders for each cohort. Send by the Friday before academy start — earlier if your cohort has heavy corporate-IT timelines.</a:t>
+            </a:r>
+          </a:p>
+        </p:txBody>
+      </p:sp>
+      <p:sp>
+        <p:nvSpPr>
+          <p:cNvPr id="4" name="Slide Number Placeholder 3"/>
+          <p:cNvSpPr>
+            <a:spLocks noGrp="1"/>
+          </p:cNvSpPr>
+          <p:nvPr>
+            <p:ph type="sldNum" sz="quarter" idx="10"/>
+          </p:nvPr>
+        </p:nvSpPr>
+        <p:spPr/>
+        <p:txBody>
+          <a:bodyPr/>
+          <a:lstStyle/>
+          <a:p>
+            <a:fld id="{18BDFEC3-8487-43E8-A154-7C12CBC1FFF2}" type="slidenum">
+              <a:rPr lang="en-US"/>
+              <a:t>24</a:t>
+            </a:fld>
+            <a:endParaRPr lang="en-US"/>
+          </a:p>
+        </p:txBody>
+      </p:sp>
+    </p:spTree>
+  </p:cSld>
+</p:notes>
+</file>
+
+<file path=ppt/notesSlides/notesSlide21.xml><?xml version="1.0" encoding="utf-8"?>
+<p:notes xmlns:a="http://schemas.openxmlformats.org/drawingml/2006/main" xmlns:r="http://schemas.openxmlformats.org/officeDocument/2006/relationships" xmlns:p="http://schemas.openxmlformats.org/presentationml/2006/main">
+  <p:cSld>
+    <p:spTree>
+      <p:nvGrpSpPr>
+        <p:cNvPr id="1" name=""/>
+        <p:cNvGrpSpPr/>
+        <p:nvPr/>
+      </p:nvGrpSpPr>
+      <p:grpSpPr>
+        <a:xfrm>
+          <a:off x="0" y="0"/>
+          <a:ext cx="0" cy="0"/>
+          <a:chOff x="0" y="0"/>
+          <a:chExt cx="0" cy="0"/>
+        </a:xfrm>
+      </p:grpSpPr>
+      <p:sp>
+        <p:nvSpPr>
+          <p:cNvPr id="2" name="Slide Image Placeholder 1"/>
+          <p:cNvSpPr>
+            <a:spLocks noGrp="1" noRot="1" noChangeAspect="1"/>
+          </p:cNvSpPr>
+          <p:nvPr>
+            <p:ph type="sldImg"/>
+          </p:nvPr>
+        </p:nvSpPr>
+        <p:spPr/>
+      </p:sp>
+      <p:sp>
+        <p:nvSpPr>
+          <p:cNvPr id="3" name="Notes Placeholder 2"/>
+          <p:cNvSpPr>
+            <a:spLocks noGrp="1"/>
+          </p:cNvSpPr>
+          <p:nvPr>
+            <p:ph type="body" idx="1"/>
+          </p:nvPr>
+        </p:nvSpPr>
+        <p:spPr/>
+        <p:txBody>
+          <a:bodyPr/>
+          <a:lstStyle/>
+          <a:p>
+            <a:pPr lvl="0" indent="0" marL="0">
+              <a:buNone/>
+            </a:pPr>
+            <a:r>
+              <a:rPr/>
+              <a:t>Point participants at the glossary early — the acronym load (PRD/TCD/TMD/SEP/DP) is heaviest in the first two weeks.</a:t>
+            </a:r>
+          </a:p>
+        </p:txBody>
+      </p:sp>
+      <p:sp>
+        <p:nvSpPr>
+          <p:cNvPr id="4" name="Slide Number Placeholder 3"/>
+          <p:cNvSpPr>
+            <a:spLocks noGrp="1"/>
+          </p:cNvSpPr>
+          <p:nvPr>
+            <p:ph type="sldNum" sz="quarter" idx="10"/>
+          </p:nvPr>
+        </p:nvSpPr>
+        <p:spPr/>
+        <p:txBody>
+          <a:bodyPr/>
+          <a:lstStyle/>
+          <a:p>
+            <a:fld id="{18BDFEC3-8487-43E8-A154-7C12CBC1FFF2}" type="slidenum">
+              <a:rPr lang="en-US"/>
+              <a:t>25</a:t>
             </a:fld>
             <a:endParaRPr lang="en-US"/>
           </a:p>
@@ -783,7 +1778,7 @@
             </a:pPr>
             <a:r>
               <a:rPr/>
-              <a:t>Local installs are intentionally minimal. The academy stays browser-first so corporate device policies don’t become a content blocker.</a:t>
+              <a:t>The pre-assessment must land before Week 1 — it’s the baseline the post-assessment is measured against.</a:t>
             </a:r>
           </a:p>
         </p:txBody>
@@ -865,7 +1860,7 @@
             </a:pPr>
             <a:r>
               <a:rPr/>
-              <a:t>Re-read this section the Friday before each week begins. Weeks 3, 7, and 8 each have setup steps that fail loudly if skipped.</a:t>
+              <a:t>Week 7’s ADO access is the one that fails loudest. Test it a full week early — section 5 says test by Friday of Week 6.</a:t>
             </a:r>
           </a:p>
         </p:txBody>
@@ -947,7 +1942,7 @@
             </a:pPr>
             <a:r>
               <a:rPr/>
-              <a:t>The pre-flight checklist exists because most facilitation problems are setup problems. Run it the Friday before — leave Monday for content, not tooling.</a:t>
+              <a:t>Pick one workspace and hold the line. Triads that scatter artifacts across three tools lose version history — which the Week-3 review depends on.</a:t>
             </a:r>
           </a:p>
         </p:txBody>
@@ -1029,7 +2024,7 @@
             </a:pPr>
             <a:r>
               <a:rPr/>
-              <a:t>Stress that the academy continues when tools fail. The fallbacks are not “lesser” — they’re a different way to build the same muscle.</a:t>
+              <a:t>Don’t over-invest here. Paper and a phone camera clear the bar for every diagram in the academy.</a:t>
             </a:r>
           </a:p>
         </p:txBody>
@@ -1051,7 +2046,7 @@
           <a:p>
             <a:fld id="{18BDFEC3-8487-43E8-A154-7C12CBC1FFF2}" type="slidenum">
               <a:rPr lang="en-US"/>
-              <a:t>11</a:t>
+              <a:t>10</a:t>
             </a:fld>
             <a:endParaRPr lang="en-US"/>
           </a:p>
@@ -1111,7 +2106,7 @@
             </a:pPr>
             <a:r>
               <a:rPr/>
-              <a:t>Most of these issues are predictable. Keep the fixes within reach so facilitators don’t troubleshoot during teaching time.</a:t>
+              <a:t>The triad channel matters more than it looks — triads persist through Week 3 and carry the mini-capstone. Give them a durable home on Day 1.</a:t>
             </a:r>
           </a:p>
         </p:txBody>
@@ -1133,7 +2128,7 @@
           <a:p>
             <a:fld id="{18BDFEC3-8487-43E8-A154-7C12CBC1FFF2}" type="slidenum">
               <a:rPr lang="en-US"/>
-              <a:t>12</a:t>
+              <a:t>11</a:t>
             </a:fld>
             <a:endParaRPr lang="en-US"/>
           </a:p>
@@ -1193,7 +2188,7 @@
             </a:pPr>
             <a:r>
               <a:rPr/>
-              <a:t>Customize the bracketed placeholders for each cohort. Send by the Friday before academy start — earlier if your cohort has heavy corporate-IT timelines.</a:t>
+              <a:t>Local installs are intentionally minimal. The academy stays browser-first so corporate device policies don’t become a content blocker.</a:t>
             </a:r>
           </a:p>
         </p:txBody>
@@ -1215,7 +2210,7 @@
           <a:p>
             <a:fld id="{18BDFEC3-8487-43E8-A154-7C12CBC1FFF2}" type="slidenum">
               <a:rPr lang="en-US"/>
-              <a:t>13</a:t>
+              <a:t>12</a:t>
             </a:fld>
             <a:endParaRPr lang="en-US"/>
           </a:p>
@@ -4255,6 +5250,1326 @@
             <p:ph type="title"/>
           </p:nvPr>
         </p:nvSpPr>
+        <p:spPr/>
+        <p:txBody>
+          <a:bodyPr/>
+          <a:lstStyle/>
+          <a:p>
+            <a:pPr lvl="0" indent="0" marL="0">
+              <a:buNone/>
+            </a:pPr>
+            <a:r>
+              <a:rPr/>
+              <a:t>2. Accounts &amp; access — diagramming</a:t>
+            </a:r>
+          </a:p>
+        </p:txBody>
+      </p:sp>
+      <p:sp>
+        <p:nvSpPr>
+          <p:cNvPr id="3" name="Content Placeholder 2"/>
+          <p:cNvSpPr>
+            <a:spLocks noGrp="1"/>
+          </p:cNvSpPr>
+          <p:nvPr>
+            <p:ph idx="1"/>
+          </p:nvPr>
+        </p:nvSpPr>
+        <p:spPr/>
+        <p:txBody>
+          <a:bodyPr/>
+          <a:lstStyle/>
+          <a:p>
+            <a:pPr lvl="0" indent="0" marL="0">
+              <a:spcBef>
+                <a:spcPts val="3000"/>
+              </a:spcBef>
+              <a:buNone/>
+            </a:pPr>
+            <a:r>
+              <a:rPr b="1"/>
+              <a:t>2.5 Diagramming (Week 4–5)</a:t>
+            </a:r>
+          </a:p>
+          <a:p>
+            <a:pPr lvl="0" indent="0" marL="0">
+              <a:buNone/>
+            </a:pPr>
+            <a:r>
+              <a:rPr/>
+              <a:t>For C4 diagrams (Wk 4 Day 3) and sequence diagrams (Wk 5 Day 4):</a:t>
+            </a:r>
+          </a:p>
+          <a:p>
+            <a:pPr lvl="0"/>
+            <a:r>
+              <a:rPr b="1"/>
+              <a:t>Whiteboard + paper</a:t>
+            </a:r>
+            <a:r>
+              <a:rPr/>
+              <a:t> is fully sufficient — phone photos serve as the artifact</a:t>
+            </a:r>
+          </a:p>
+          <a:p>
+            <a:pPr lvl="0"/>
+            <a:r>
+              <a:rPr b="1"/>
+              <a:t>Miro / Lucidchart / Excalidraw / Figma</a:t>
+            </a:r>
+            <a:r>
+              <a:rPr/>
+              <a:t> if digital is preferred</a:t>
+            </a:r>
+          </a:p>
+          <a:p>
+            <a:pPr lvl="0"/>
+            <a:r>
+              <a:rPr b="1"/>
+              <a:t>Mermaid</a:t>
+            </a:r>
+            <a:r>
+              <a:rPr/>
+              <a:t> in the team’s wiki for inline-in-doc diagrams</a:t>
+            </a:r>
+          </a:p>
+          <a:p>
+            <a:pPr lvl="0" indent="0" marL="0">
+              <a:buNone/>
+            </a:pPr>
+            <a:r>
+              <a:rPr/>
+              <a:t>Don’t over-invest in tooling here; the diagrams are thinking aids, not deliverables.</a:t>
+            </a:r>
+          </a:p>
+        </p:txBody>
+      </p:sp>
+    </p:spTree>
+  </p:cSld>
+</p:sld>
+</file>
+
+<file path=ppt/slides/slide11.xml><?xml version="1.0" encoding="utf-8"?>
+<p:sld xmlns:a="http://schemas.openxmlformats.org/drawingml/2006/main" xmlns:r="http://schemas.openxmlformats.org/officeDocument/2006/relationships" xmlns:p="http://schemas.openxmlformats.org/presentationml/2006/main">
+  <p:cSld>
+    <p:spTree>
+      <p:nvGrpSpPr>
+        <p:cNvPr id="1" name=""/>
+        <p:cNvGrpSpPr/>
+        <p:nvPr/>
+      </p:nvGrpSpPr>
+      <p:grpSpPr>
+        <a:xfrm>
+          <a:off x="0" y="0"/>
+          <a:ext cx="0" cy="0"/>
+          <a:chOff x="0" y="0"/>
+          <a:chExt cx="0" cy="0"/>
+        </a:xfrm>
+      </p:grpSpPr>
+      <p:sp>
+        <p:nvSpPr>
+          <p:cNvPr id="2" name="Title 1"/>
+          <p:cNvSpPr>
+            <a:spLocks noGrp="1"/>
+          </p:cNvSpPr>
+          <p:nvPr>
+            <p:ph type="title"/>
+          </p:nvPr>
+        </p:nvSpPr>
+        <p:spPr/>
+        <p:txBody>
+          <a:bodyPr/>
+          <a:lstStyle/>
+          <a:p>
+            <a:pPr lvl="0" indent="0" marL="0">
+              <a:buNone/>
+            </a:pPr>
+            <a:r>
+              <a:rPr/>
+              <a:t>2. Accounts &amp; access — communication</a:t>
+            </a:r>
+          </a:p>
+        </p:txBody>
+      </p:sp>
+      <p:sp>
+        <p:nvSpPr>
+          <p:cNvPr id="3" name="Content Placeholder 2"/>
+          <p:cNvSpPr>
+            <a:spLocks noGrp="1"/>
+          </p:cNvSpPr>
+          <p:nvPr>
+            <p:ph idx="1"/>
+          </p:nvPr>
+        </p:nvSpPr>
+        <p:spPr/>
+        <p:txBody>
+          <a:bodyPr/>
+          <a:lstStyle/>
+          <a:p>
+            <a:pPr lvl="0" indent="0" marL="0">
+              <a:spcBef>
+                <a:spcPts val="3000"/>
+              </a:spcBef>
+              <a:buNone/>
+            </a:pPr>
+            <a:r>
+              <a:rPr b="1"/>
+              <a:t>2.6 Communication</a:t>
+            </a:r>
+          </a:p>
+          <a:p>
+            <a:pPr lvl="0"/>
+            <a:r>
+              <a:rPr/>
+              <a:t>A </a:t>
+            </a:r>
+            <a:r>
+              <a:rPr b="1"/>
+              <a:t>cohort channel</a:t>
+            </a:r>
+            <a:r>
+              <a:rPr/>
+              <a:t> (Slack / Teams) for async Q&amp;A and resource sharing</a:t>
+            </a:r>
+          </a:p>
+          <a:p>
+            <a:pPr lvl="0"/>
+            <a:r>
+              <a:rPr/>
+              <a:t>A </a:t>
+            </a:r>
+            <a:r>
+              <a:rPr b="1"/>
+              <a:t>triad channel</a:t>
+            </a:r>
+            <a:r>
+              <a:rPr/>
+              <a:t> per triad for daily coordination</a:t>
+            </a:r>
+          </a:p>
+          <a:p>
+            <a:pPr lvl="0"/>
+            <a:r>
+              <a:rPr/>
+              <a:t>An </a:t>
+            </a:r>
+            <a:r>
+              <a:rPr b="1"/>
+              <a:t>instructor DM thread</a:t>
+            </a:r>
+            <a:r>
+              <a:rPr/>
+              <a:t> for individual coaching</a:t>
+            </a:r>
+          </a:p>
+        </p:txBody>
+      </p:sp>
+    </p:spTree>
+  </p:cSld>
+</p:sld>
+</file>
+
+<file path=ppt/slides/slide12.xml><?xml version="1.0" encoding="utf-8"?>
+<p:sld xmlns:a="http://schemas.openxmlformats.org/drawingml/2006/main" xmlns:r="http://schemas.openxmlformats.org/officeDocument/2006/relationships" xmlns:p="http://schemas.openxmlformats.org/presentationml/2006/main">
+  <p:cSld>
+    <p:spTree>
+      <p:nvGrpSpPr>
+        <p:cNvPr id="1" name=""/>
+        <p:cNvGrpSpPr/>
+        <p:nvPr/>
+      </p:nvGrpSpPr>
+      <p:grpSpPr>
+        <a:xfrm>
+          <a:off x="0" y="0"/>
+          <a:ext cx="0" cy="0"/>
+          <a:chOff x="0" y="0"/>
+          <a:chExt cx="0" cy="0"/>
+        </a:xfrm>
+      </p:grpSpPr>
+      <p:sp>
+        <p:nvSpPr>
+          <p:cNvPr id="2" name="Title 1"/>
+          <p:cNvSpPr>
+            <a:spLocks noGrp="1"/>
+          </p:cNvSpPr>
+          <p:nvPr>
+            <p:ph type="title"/>
+          </p:nvPr>
+        </p:nvSpPr>
+        <p:spPr/>
+        <p:txBody>
+          <a:bodyPr/>
+          <a:lstStyle/>
+          <a:p>
+            <a:pPr lvl="0" indent="0" marL="0">
+              <a:buNone/>
+            </a:pPr>
+            <a:r>
+              <a:rPr/>
+              <a:t>3. Installations (pre-academy)</a:t>
+            </a:r>
+          </a:p>
+        </p:txBody>
+      </p:sp>
+      <p:sp>
+        <p:nvSpPr>
+          <p:cNvPr id="3" name="Content Placeholder 2"/>
+          <p:cNvSpPr>
+            <a:spLocks noGrp="1"/>
+          </p:cNvSpPr>
+          <p:nvPr>
+            <p:ph idx="1"/>
+          </p:nvPr>
+        </p:nvSpPr>
+        <p:spPr/>
+        <p:txBody>
+          <a:bodyPr/>
+          <a:lstStyle/>
+          <a:p>
+            <a:pPr lvl="0" indent="0" marL="0">
+              <a:buNone/>
+            </a:pPr>
+            <a:r>
+              <a:rPr/>
+              <a:t>Most academy tools are browser-based. Two local installs help.</a:t>
+            </a:r>
+          </a:p>
+          <a:p>
+            <a:pPr lvl="0" indent="0" marL="0">
+              <a:spcBef>
+                <a:spcPts val="3000"/>
+              </a:spcBef>
+              <a:buNone/>
+            </a:pPr>
+            <a:r>
+              <a:rPr b="1"/>
+              <a:t>3.1 Reveal.js decks (already provided)</a:t>
+            </a:r>
+          </a:p>
+          <a:p>
+            <a:pPr lvl="0" indent="0" marL="0">
+              <a:buNone/>
+            </a:pPr>
+            <a:r>
+              <a:rPr/>
+              <a:t>The daily decks live in </a:t>
+            </a:r>
+            <a:r>
+              <a:rPr>
+                <a:latin typeface="Courier"/>
+              </a:rPr>
+              <a:t>week-XX/presentations/day-XX-*.html</a:t>
+            </a:r>
+            <a:r>
+              <a:rPr/>
+              <a:t>. They render directly in any modern browser:</a:t>
+            </a:r>
+          </a:p>
+          <a:p>
+            <a:pPr lvl="0" indent="0">
+              <a:buNone/>
+            </a:pPr>
+            <a:r>
+              <a:rPr>
+                <a:latin typeface="Courier"/>
+              </a:rPr>
+              <a:t>File → Open → week-01/presentations/day-01-ai-fundamentals-prompting.html</a:t>
+            </a:r>
+          </a:p>
+          <a:p>
+            <a:pPr lvl="0" indent="0" marL="0">
+              <a:buNone/>
+            </a:pPr>
+            <a:r>
+              <a:rPr/>
+              <a:t>No build step needed; Reveal.js loads from CDN. Press </a:t>
+            </a:r>
+            <a:r>
+              <a:rPr>
+                <a:latin typeface="Courier"/>
+              </a:rPr>
+              <a:t>S</a:t>
+            </a:r>
+            <a:r>
+              <a:rPr/>
+              <a:t> for speaker notes / clock.</a:t>
+            </a:r>
+          </a:p>
+        </p:txBody>
+      </p:sp>
+    </p:spTree>
+  </p:cSld>
+</p:sld>
+</file>
+
+<file path=ppt/slides/slide13.xml><?xml version="1.0" encoding="utf-8"?>
+<p:sld xmlns:a="http://schemas.openxmlformats.org/drawingml/2006/main" xmlns:r="http://schemas.openxmlformats.org/officeDocument/2006/relationships" xmlns:p="http://schemas.openxmlformats.org/presentationml/2006/main">
+  <p:cSld>
+    <p:spTree>
+      <p:nvGrpSpPr>
+        <p:cNvPr id="1" name=""/>
+        <p:cNvGrpSpPr/>
+        <p:nvPr/>
+      </p:nvGrpSpPr>
+      <p:grpSpPr>
+        <a:xfrm>
+          <a:off x="0" y="0"/>
+          <a:ext cx="0" cy="0"/>
+          <a:chOff x="0" y="0"/>
+          <a:chExt cx="0" cy="0"/>
+        </a:xfrm>
+      </p:grpSpPr>
+      <p:sp>
+        <p:nvSpPr>
+          <p:cNvPr id="2" name="Title 1"/>
+          <p:cNvSpPr>
+            <a:spLocks noGrp="1"/>
+          </p:cNvSpPr>
+          <p:nvPr>
+            <p:ph type="title"/>
+          </p:nvPr>
+        </p:nvSpPr>
+        <p:spPr/>
+        <p:txBody>
+          <a:bodyPr/>
+          <a:lstStyle/>
+          <a:p>
+            <a:pPr lvl="0" indent="0" marL="0">
+              <a:buNone/>
+            </a:pPr>
+            <a:r>
+              <a:rPr/>
+              <a:t>3. Installations (cont.)</a:t>
+            </a:r>
+          </a:p>
+        </p:txBody>
+      </p:sp>
+      <p:sp>
+        <p:nvSpPr>
+          <p:cNvPr id="3" name="Content Placeholder 2"/>
+          <p:cNvSpPr>
+            <a:spLocks noGrp="1"/>
+          </p:cNvSpPr>
+          <p:nvPr>
+            <p:ph idx="1"/>
+          </p:nvPr>
+        </p:nvSpPr>
+        <p:spPr/>
+        <p:txBody>
+          <a:bodyPr/>
+          <a:lstStyle/>
+          <a:p>
+            <a:pPr lvl="0" indent="0" marL="0">
+              <a:spcBef>
+                <a:spcPts val="3000"/>
+              </a:spcBef>
+              <a:buNone/>
+            </a:pPr>
+            <a:r>
+              <a:rPr b="1"/>
+              <a:t>3.2 Markdown editor (recommended)</a:t>
+            </a:r>
+          </a:p>
+          <a:p>
+            <a:pPr lvl="0" indent="0" marL="0">
+              <a:buNone/>
+            </a:pPr>
+            <a:r>
+              <a:rPr/>
+              <a:t>For authoring PRDs, TCDs, etc., a markdown editor with live preview is helpful:</a:t>
+            </a:r>
+          </a:p>
+          <a:p>
+            <a:pPr lvl="0"/>
+            <a:r>
+              <a:rPr b="1"/>
+              <a:t>Obsidian</a:t>
+            </a:r>
+            <a:r>
+              <a:rPr/>
+              <a:t> (free) — strong cross-doc linking</a:t>
+            </a:r>
+          </a:p>
+          <a:p>
+            <a:pPr lvl="0"/>
+            <a:r>
+              <a:rPr b="1"/>
+              <a:t>VS Code</a:t>
+            </a:r>
+            <a:r>
+              <a:rPr/>
+              <a:t> + Markdown Preview Enhanced</a:t>
+            </a:r>
+          </a:p>
+          <a:p>
+            <a:pPr lvl="0"/>
+            <a:r>
+              <a:rPr b="1"/>
+              <a:t>Typora</a:t>
+            </a:r>
+            <a:r>
+              <a:rPr/>
+              <a:t> (paid) — minimal interface</a:t>
+            </a:r>
+          </a:p>
+          <a:p>
+            <a:pPr lvl="0" indent="0" marL="0">
+              <a:buNone/>
+            </a:pPr>
+            <a:r>
+              <a:rPr/>
+              <a:t>The labs reference markdown templates throughout; a comfortable editor pays off across all 8 weeks.</a:t>
+            </a:r>
+          </a:p>
+        </p:txBody>
+      </p:sp>
+    </p:spTree>
+  </p:cSld>
+</p:sld>
+</file>
+
+<file path=ppt/slides/slide14.xml><?xml version="1.0" encoding="utf-8"?>
+<p:sld xmlns:a="http://schemas.openxmlformats.org/drawingml/2006/main" xmlns:r="http://schemas.openxmlformats.org/officeDocument/2006/relationships" xmlns:p="http://schemas.openxmlformats.org/presentationml/2006/main">
+  <p:cSld>
+    <p:spTree>
+      <p:nvGrpSpPr>
+        <p:cNvPr id="1" name=""/>
+        <p:cNvGrpSpPr/>
+        <p:nvPr/>
+      </p:nvGrpSpPr>
+      <p:grpSpPr>
+        <a:xfrm>
+          <a:off x="0" y="0"/>
+          <a:ext cx="0" cy="0"/>
+          <a:chOff x="0" y="0"/>
+          <a:chExt cx="0" cy="0"/>
+        </a:xfrm>
+      </p:grpSpPr>
+      <p:sp>
+        <p:nvSpPr>
+          <p:cNvPr id="2" name="Title 1"/>
+          <p:cNvSpPr>
+            <a:spLocks noGrp="1"/>
+          </p:cNvSpPr>
+          <p:nvPr>
+            <p:ph type="title"/>
+          </p:nvPr>
+        </p:nvSpPr>
+        <p:spPr/>
+        <p:txBody>
+          <a:bodyPr/>
+          <a:lstStyle/>
+          <a:p>
+            <a:pPr lvl="0" indent="0" marL="0">
+              <a:buNone/>
+            </a:pPr>
+            <a:r>
+              <a:rPr/>
+              <a:t>4. Week-by-week additions (Weeks 1–2)</a:t>
+            </a:r>
+          </a:p>
+        </p:txBody>
+      </p:sp>
+      <p:sp>
+        <p:nvSpPr>
+          <p:cNvPr id="3" name="Content Placeholder 2"/>
+          <p:cNvSpPr>
+            <a:spLocks noGrp="1"/>
+          </p:cNvSpPr>
+          <p:nvPr>
+            <p:ph idx="1"/>
+          </p:nvPr>
+        </p:nvSpPr>
+        <p:spPr/>
+        <p:txBody>
+          <a:bodyPr/>
+          <a:lstStyle/>
+          <a:p>
+            <a:pPr lvl="0" indent="0" marL="0">
+              <a:spcBef>
+                <a:spcPts val="3000"/>
+              </a:spcBef>
+              <a:buNone/>
+            </a:pPr>
+            <a:r>
+              <a:rPr b="1"/>
+              <a:t>Week 1 — Customer-Centric Foundations</a:t>
+            </a:r>
+          </a:p>
+          <a:p>
+            <a:pPr lvl="0"/>
+            <a:r>
+              <a:rPr/>
+              <a:t>All AI tools confirmed and working</a:t>
+            </a:r>
+          </a:p>
+          <a:p>
+            <a:pPr lvl="0"/>
+            <a:r>
+              <a:rPr/>
+              <a:t>Persona Validation Canvas, Pain-Point Severity Matrix, Problem Statement Template (printed or digital — see lab packets)</a:t>
+            </a:r>
+          </a:p>
+          <a:p>
+            <a:pPr lvl="0" indent="0" marL="0">
+              <a:spcBef>
+                <a:spcPts val="3000"/>
+              </a:spcBef>
+              <a:buNone/>
+            </a:pPr>
+            <a:r>
+              <a:rPr b="1"/>
+              <a:t>Week 2 — Strategic Design &amp; Metrics</a:t>
+            </a:r>
+          </a:p>
+          <a:p>
+            <a:pPr lvl="0"/>
+            <a:r>
+              <a:rPr/>
+              <a:t>Spreadsheet for Tier Sheet (Excel / Google Sheets / Numbers)</a:t>
+            </a:r>
+          </a:p>
+          <a:p>
+            <a:pPr lvl="0"/>
+            <a:r>
+              <a:rPr/>
+              <a:t>Whiteboard or A2 paper for Journey Map Canvas (Day 5)</a:t>
+            </a:r>
+          </a:p>
+          <a:p>
+            <a:pPr lvl="0"/>
+            <a:r>
+              <a:rPr/>
+              <a:t>One shared SaaS product for the Day 3 Heuristic Hunt (e.g. Trello) — same product cohort-wide</a:t>
+            </a:r>
+          </a:p>
+        </p:txBody>
+      </p:sp>
+    </p:spTree>
+  </p:cSld>
+</p:sld>
+</file>
+
+<file path=ppt/slides/slide15.xml><?xml version="1.0" encoding="utf-8"?>
+<p:sld xmlns:a="http://schemas.openxmlformats.org/drawingml/2006/main" xmlns:r="http://schemas.openxmlformats.org/officeDocument/2006/relationships" xmlns:p="http://schemas.openxmlformats.org/presentationml/2006/main">
+  <p:cSld>
+    <p:spTree>
+      <p:nvGrpSpPr>
+        <p:cNvPr id="1" name=""/>
+        <p:cNvGrpSpPr/>
+        <p:nvPr/>
+      </p:nvGrpSpPr>
+      <p:grpSpPr>
+        <a:xfrm>
+          <a:off x="0" y="0"/>
+          <a:ext cx="0" cy="0"/>
+          <a:chOff x="0" y="0"/>
+          <a:chExt cx="0" cy="0"/>
+        </a:xfrm>
+      </p:grpSpPr>
+      <p:sp>
+        <p:nvSpPr>
+          <p:cNvPr id="2" name="Title 1"/>
+          <p:cNvSpPr>
+            <a:spLocks noGrp="1"/>
+          </p:cNvSpPr>
+          <p:nvPr>
+            <p:ph type="title"/>
+          </p:nvPr>
+        </p:nvSpPr>
+        <p:spPr/>
+        <p:txBody>
+          <a:bodyPr/>
+          <a:lstStyle/>
+          <a:p>
+            <a:pPr lvl="0" indent="0" marL="0">
+              <a:buNone/>
+            </a:pPr>
+            <a:r>
+              <a:rPr/>
+              <a:t>4. Week-by-week additions (Weeks 3–4)</a:t>
+            </a:r>
+          </a:p>
+        </p:txBody>
+      </p:sp>
+      <p:sp>
+        <p:nvSpPr>
+          <p:cNvPr id="3" name="Content Placeholder 2"/>
+          <p:cNvSpPr>
+            <a:spLocks noGrp="1"/>
+          </p:cNvSpPr>
+          <p:nvPr>
+            <p:ph idx="1"/>
+          </p:nvPr>
+        </p:nvSpPr>
+        <p:spPr/>
+        <p:txBody>
+          <a:bodyPr/>
+          <a:lstStyle/>
+          <a:p>
+            <a:pPr lvl="0" indent="0" marL="0">
+              <a:spcBef>
+                <a:spcPts val="3000"/>
+              </a:spcBef>
+              <a:buNone/>
+            </a:pPr>
+            <a:r>
+              <a:rPr b="1"/>
+              <a:t>Week 3 — Requirements Engineering &amp; Mini-Capstone</a:t>
+            </a:r>
+          </a:p>
+          <a:p>
+            <a:pPr lvl="0"/>
+            <a:r>
+              <a:rPr b="1"/>
+              <a:t>AI tools off</a:t>
+            </a:r>
+            <a:r>
+              <a:rPr/>
+              <a:t> for the week — honor system. Disable AI features in your editor.</a:t>
+            </a:r>
+          </a:p>
+          <a:p>
+            <a:pPr lvl="0"/>
+            <a:r>
+              <a:rPr/>
+              <a:t>Markdown editor for PRD drafting</a:t>
+            </a:r>
+          </a:p>
+          <a:p>
+            <a:pPr lvl="0"/>
+            <a:r>
+              <a:rPr/>
+              <a:t>Print or share digitally: PRD template (1 per triad)</a:t>
+            </a:r>
+          </a:p>
+          <a:p>
+            <a:pPr lvl="0" indent="0" marL="0">
+              <a:spcBef>
+                <a:spcPts val="3000"/>
+              </a:spcBef>
+              <a:buNone/>
+            </a:pPr>
+            <a:r>
+              <a:rPr b="1"/>
+              <a:t>Week 4 — Technical Architecture &amp; Constraints</a:t>
+            </a:r>
+          </a:p>
+          <a:p>
+            <a:pPr lvl="0"/>
+            <a:r>
+              <a:rPr/>
+              <a:t>AI tools restored</a:t>
+            </a:r>
+          </a:p>
+          <a:p>
+            <a:pPr lvl="0"/>
+            <a:r>
+              <a:rPr/>
+              <a:t>Whiteboard / Miro / Lucidchart for C4 diagrams (Day 3)</a:t>
+            </a:r>
+          </a:p>
+          <a:p>
+            <a:pPr lvl="0"/>
+            <a:r>
+              <a:rPr/>
+              <a:t>STRIDE Card handout (Day 2)</a:t>
+            </a:r>
+          </a:p>
+        </p:txBody>
+      </p:sp>
+    </p:spTree>
+  </p:cSld>
+</p:sld>
+</file>
+
+<file path=ppt/slides/slide16.xml><?xml version="1.0" encoding="utf-8"?>
+<p:sld xmlns:a="http://schemas.openxmlformats.org/drawingml/2006/main" xmlns:r="http://schemas.openxmlformats.org/officeDocument/2006/relationships" xmlns:p="http://schemas.openxmlformats.org/presentationml/2006/main">
+  <p:cSld>
+    <p:spTree>
+      <p:nvGrpSpPr>
+        <p:cNvPr id="1" name=""/>
+        <p:cNvGrpSpPr/>
+        <p:nvPr/>
+      </p:nvGrpSpPr>
+      <p:grpSpPr>
+        <a:xfrm>
+          <a:off x="0" y="0"/>
+          <a:ext cx="0" cy="0"/>
+          <a:chOff x="0" y="0"/>
+          <a:chExt cx="0" cy="0"/>
+        </a:xfrm>
+      </p:grpSpPr>
+      <p:sp>
+        <p:nvSpPr>
+          <p:cNvPr id="2" name="Title 1"/>
+          <p:cNvSpPr>
+            <a:spLocks noGrp="1"/>
+          </p:cNvSpPr>
+          <p:nvPr>
+            <p:ph type="title"/>
+          </p:nvPr>
+        </p:nvSpPr>
+        <p:spPr/>
+        <p:txBody>
+          <a:bodyPr/>
+          <a:lstStyle/>
+          <a:p>
+            <a:pPr lvl="0" indent="0" marL="0">
+              <a:buNone/>
+            </a:pPr>
+            <a:r>
+              <a:rPr/>
+              <a:t>4. Week-by-week additions (Weeks 5–6)</a:t>
+            </a:r>
+          </a:p>
+        </p:txBody>
+      </p:sp>
+      <p:sp>
+        <p:nvSpPr>
+          <p:cNvPr id="3" name="Content Placeholder 2"/>
+          <p:cNvSpPr>
+            <a:spLocks noGrp="1"/>
+          </p:cNvSpPr>
+          <p:nvPr>
+            <p:ph idx="1"/>
+          </p:nvPr>
+        </p:nvSpPr>
+        <p:spPr/>
+        <p:txBody>
+          <a:bodyPr/>
+          <a:lstStyle/>
+          <a:p>
+            <a:pPr lvl="0" indent="0" marL="0">
+              <a:spcBef>
+                <a:spcPts val="3000"/>
+              </a:spcBef>
+              <a:buNone/>
+            </a:pPr>
+            <a:r>
+              <a:rPr b="1"/>
+              <a:t>Week 5 — Technical Infrastructure &amp; Modeling</a:t>
+            </a:r>
+          </a:p>
+          <a:p>
+            <a:pPr lvl="0"/>
+            <a:r>
+              <a:rPr/>
+              <a:t>AI tools, with validation discipline</a:t>
+            </a:r>
+          </a:p>
+          <a:p>
+            <a:pPr lvl="0"/>
+            <a:r>
+              <a:rPr/>
+              <a:t>Diagramming tool for sequence diagrams (Day 4)</a:t>
+            </a:r>
+          </a:p>
+          <a:p>
+            <a:pPr lvl="0"/>
+            <a:r>
+              <a:rPr/>
+              <a:t>Reference cards for HTTP status codes, REST methods (printed or bookmarked)</a:t>
+            </a:r>
+          </a:p>
+          <a:p>
+            <a:pPr lvl="0" indent="0" marL="0">
+              <a:spcBef>
+                <a:spcPts val="3000"/>
+              </a:spcBef>
+              <a:buNone/>
+            </a:pPr>
+            <a:r>
+              <a:rPr b="1"/>
+              <a:t>Week 6 — Stakeholder Alignment &amp; Negotiation</a:t>
+            </a:r>
+          </a:p>
+          <a:p>
+            <a:pPr lvl="0"/>
+            <a:r>
+              <a:rPr/>
+              <a:t>Power × Interest grid (paper or whiteboard)</a:t>
+            </a:r>
+          </a:p>
+          <a:p>
+            <a:pPr lvl="0"/>
+            <a:r>
+              <a:rPr/>
+              <a:t>Stakeholder persona scripts (Day 5 simulation handouts) — instructor prepares ahead</a:t>
+            </a:r>
+          </a:p>
+          <a:p>
+            <a:pPr lvl="0"/>
+            <a:r>
+              <a:rPr/>
+              <a:t>Surprise objection sets (Day 5) — instructor prepares ahead</a:t>
+            </a:r>
+          </a:p>
+        </p:txBody>
+      </p:sp>
+    </p:spTree>
+  </p:cSld>
+</p:sld>
+</file>
+
+<file path=ppt/slides/slide17.xml><?xml version="1.0" encoding="utf-8"?>
+<p:sld xmlns:a="http://schemas.openxmlformats.org/drawingml/2006/main" xmlns:r="http://schemas.openxmlformats.org/officeDocument/2006/relationships" xmlns:p="http://schemas.openxmlformats.org/presentationml/2006/main">
+  <p:cSld>
+    <p:spTree>
+      <p:nvGrpSpPr>
+        <p:cNvPr id="1" name=""/>
+        <p:cNvGrpSpPr/>
+        <p:nvPr/>
+      </p:nvGrpSpPr>
+      <p:grpSpPr>
+        <a:xfrm>
+          <a:off x="0" y="0"/>
+          <a:ext cx="0" cy="0"/>
+          <a:chOff x="0" y="0"/>
+          <a:chExt cx="0" cy="0"/>
+        </a:xfrm>
+      </p:grpSpPr>
+      <p:sp>
+        <p:nvSpPr>
+          <p:cNvPr id="2" name="Title 1"/>
+          <p:cNvSpPr>
+            <a:spLocks noGrp="1"/>
+          </p:cNvSpPr>
+          <p:nvPr>
+            <p:ph type="title"/>
+          </p:nvPr>
+        </p:nvSpPr>
+        <p:spPr/>
+        <p:txBody>
+          <a:bodyPr/>
+          <a:lstStyle/>
+          <a:p>
+            <a:pPr lvl="0" indent="0" marL="0">
+              <a:buNone/>
+            </a:pPr>
+            <a:r>
+              <a:rPr/>
+              <a:t>4. Week-by-week additions (Weeks 7–8)</a:t>
+            </a:r>
+          </a:p>
+        </p:txBody>
+      </p:sp>
+      <p:sp>
+        <p:nvSpPr>
+          <p:cNvPr id="3" name="Content Placeholder 2"/>
+          <p:cNvSpPr>
+            <a:spLocks noGrp="1"/>
+          </p:cNvSpPr>
+          <p:nvPr>
+            <p:ph idx="1"/>
+          </p:nvPr>
+        </p:nvSpPr>
+        <p:spPr/>
+        <p:txBody>
+          <a:bodyPr/>
+          <a:lstStyle/>
+          <a:p>
+            <a:pPr lvl="0" indent="0" marL="0">
+              <a:spcBef>
+                <a:spcPts val="3000"/>
+              </a:spcBef>
+              <a:buNone/>
+            </a:pPr>
+            <a:r>
+              <a:rPr b="1"/>
+              <a:t>Week 7 — Agile Delivery &amp; ADO Mastery</a:t>
+            </a:r>
+          </a:p>
+          <a:p>
+            <a:pPr lvl="0"/>
+            <a:r>
+              <a:rPr b="1"/>
+              <a:t>ADO access confirmed</a:t>
+            </a:r>
+            <a:r>
+              <a:rPr/>
+              <a:t> (see 2.3 above)</a:t>
+            </a:r>
+          </a:p>
+          <a:p>
+            <a:pPr lvl="0"/>
+            <a:r>
+              <a:rPr/>
+              <a:t>ADO Cheat Sheet handout (Day 2)</a:t>
+            </a:r>
+          </a:p>
+          <a:p>
+            <a:pPr lvl="0"/>
+            <a:r>
+              <a:rPr/>
+              <a:t>VSM Canvas — large paper or whiteboard (Day 4)</a:t>
+            </a:r>
+          </a:p>
+          <a:p>
+            <a:pPr lvl="0" indent="0" marL="0">
+              <a:spcBef>
+                <a:spcPts val="3000"/>
+              </a:spcBef>
+              <a:buNone/>
+            </a:pPr>
+            <a:r>
+              <a:rPr b="1"/>
+              <a:t>Week 8 — AI Spec Development &amp; Capstone</a:t>
+            </a:r>
+          </a:p>
+          <a:p>
+            <a:pPr lvl="0"/>
+            <a:r>
+              <a:rPr/>
+              <a:t>AI tools, with validation discipline</a:t>
+            </a:r>
+          </a:p>
+          <a:p>
+            <a:pPr lvl="0"/>
+            <a:r>
+              <a:rPr/>
+              <a:t>Capstone subject inputs gathered before Day 1 (interviews / data / docs — per triad)</a:t>
+            </a:r>
+          </a:p>
+          <a:p>
+            <a:pPr lvl="0"/>
+            <a:r>
+              <a:rPr/>
+              <a:t>Presentation projector / screen sharing for Friday</a:t>
+            </a:r>
+          </a:p>
+          <a:p>
+            <a:pPr lvl="0"/>
+            <a:r>
+              <a:rPr/>
+              <a:t>Post-assessment access confirmed (Skills / SkillIQ)</a:t>
+            </a:r>
+          </a:p>
+        </p:txBody>
+      </p:sp>
+    </p:spTree>
+  </p:cSld>
+</p:sld>
+</file>
+
+<file path=ppt/slides/slide18.xml><?xml version="1.0" encoding="utf-8"?>
+<p:sld xmlns:a="http://schemas.openxmlformats.org/drawingml/2006/main" xmlns:r="http://schemas.openxmlformats.org/officeDocument/2006/relationships" xmlns:p="http://schemas.openxmlformats.org/presentationml/2006/main">
+  <p:cSld>
+    <p:spTree>
+      <p:nvGrpSpPr>
+        <p:cNvPr id="1" name=""/>
+        <p:cNvGrpSpPr/>
+        <p:nvPr/>
+      </p:nvGrpSpPr>
+      <p:grpSpPr>
+        <a:xfrm>
+          <a:off x="0" y="0"/>
+          <a:ext cx="0" cy="0"/>
+          <a:chOff x="0" y="0"/>
+          <a:chExt cx="0" cy="0"/>
+        </a:xfrm>
+      </p:grpSpPr>
+      <p:sp>
+        <p:nvSpPr>
+          <p:cNvPr id="2" name="Title 1"/>
+          <p:cNvSpPr>
+            <a:spLocks noGrp="1"/>
+          </p:cNvSpPr>
+          <p:nvPr>
+            <p:ph type="title"/>
+          </p:nvPr>
+        </p:nvSpPr>
+        <p:spPr/>
+        <p:txBody>
+          <a:bodyPr/>
+          <a:lstStyle/>
+          <a:p>
+            <a:pPr lvl="0" indent="0" marL="0">
+              <a:buNone/>
+            </a:pPr>
+            <a:r>
+              <a:rPr/>
+              <a:t>5. Facilitator pre-flight checklist (per week)</a:t>
+            </a:r>
+          </a:p>
+        </p:txBody>
+      </p:sp>
+      <p:sp>
+        <p:nvSpPr>
+          <p:cNvPr id="3" name="Content Placeholder 2"/>
+          <p:cNvSpPr>
+            <a:spLocks noGrp="1"/>
+          </p:cNvSpPr>
+          <p:nvPr>
+            <p:ph idx="1"/>
+          </p:nvPr>
+        </p:nvSpPr>
+        <p:spPr/>
+        <p:txBody>
+          <a:bodyPr/>
+          <a:lstStyle/>
+          <a:p>
+            <a:pPr lvl="0" indent="0" marL="0">
+              <a:buNone/>
+            </a:pPr>
+            <a:r>
+              <a:rPr/>
+              <a:t>Run this checklist the </a:t>
+            </a:r>
+            <a:r>
+              <a:rPr b="1"/>
+              <a:t>Friday before each week begins</a:t>
+            </a:r>
+            <a:r>
+              <a:rPr/>
+              <a:t>:</a:t>
+            </a:r>
+          </a:p>
+          <a:p>
+            <a:pPr lvl="0"/>
+            <a:r>
+              <a:rPr/>
+              <a:t>☐ All participants have access to required tools (cross-check section 4)</a:t>
+            </a:r>
+          </a:p>
+          <a:p>
+            <a:pPr lvl="0"/>
+            <a:r>
+              <a:rPr/>
+              <a:t>☐ Print or digitally share the lab packet for Monday</a:t>
+            </a:r>
+          </a:p>
+          <a:p>
+            <a:pPr lvl="0"/>
+            <a:r>
+              <a:rPr/>
+              <a:t>☐ Pre-print handouts called out in each day’s facilitator guide</a:t>
+            </a:r>
+          </a:p>
+          <a:p>
+            <a:pPr lvl="0"/>
+            <a:r>
+              <a:rPr/>
+              <a:t>☐ Confirm Week-specific instructor-prepared materials (Wk 6 stakeholder personas, Wk 7 ADO sandbox, etc.)</a:t>
+            </a:r>
+          </a:p>
+          <a:p>
+            <a:pPr lvl="0"/>
+            <a:r>
+              <a:rPr/>
+              <a:t>☐ Verify cohort channel and triad channels are live</a:t>
+            </a:r>
+          </a:p>
+          <a:p>
+            <a:pPr lvl="0"/>
+            <a:r>
+              <a:rPr/>
+              <a:t>☐ Verify the deck file for each day opens correctly in browser</a:t>
+            </a:r>
+          </a:p>
+        </p:txBody>
+      </p:sp>
+    </p:spTree>
+  </p:cSld>
+</p:sld>
+</file>
+
+<file path=ppt/slides/slide19.xml><?xml version="1.0" encoding="utf-8"?>
+<p:sld xmlns:a="http://schemas.openxmlformats.org/drawingml/2006/main" xmlns:r="http://schemas.openxmlformats.org/officeDocument/2006/relationships" xmlns:p="http://schemas.openxmlformats.org/presentationml/2006/main">
+  <p:cSld>
+    <p:spTree>
+      <p:nvGrpSpPr>
+        <p:cNvPr id="1" name=""/>
+        <p:cNvGrpSpPr/>
+        <p:nvPr/>
+      </p:nvGrpSpPr>
+      <p:grpSpPr>
+        <a:xfrm>
+          <a:off x="0" y="0"/>
+          <a:ext cx="0" cy="0"/>
+          <a:chOff x="0" y="0"/>
+          <a:chExt cx="0" cy="0"/>
+        </a:xfrm>
+      </p:grpSpPr>
+      <p:sp>
+        <p:nvSpPr>
+          <p:cNvPr id="2" name="Title 1"/>
+          <p:cNvSpPr>
+            <a:spLocks noGrp="1"/>
+          </p:cNvSpPr>
+          <p:nvPr>
+            <p:ph type="title"/>
+          </p:nvPr>
+        </p:nvSpPr>
+        <p:spPr/>
+        <p:txBody>
+          <a:bodyPr/>
+          <a:lstStyle/>
+          <a:p>
+            <a:pPr lvl="0" indent="0" marL="0">
+              <a:buNone/>
+            </a:pPr>
+            <a:r>
+              <a:rPr/>
+              <a:t>5. Pre-flight — the two that bite</a:t>
+            </a:r>
+          </a:p>
+        </p:txBody>
+      </p:sp>
+      <p:sp>
+        <p:nvSpPr>
+          <p:cNvPr id="3" name="Content Placeholder 2"/>
+          <p:cNvSpPr>
+            <a:spLocks noGrp="1"/>
+          </p:cNvSpPr>
+          <p:nvPr>
+            <p:ph idx="1"/>
+          </p:nvPr>
+        </p:nvSpPr>
+        <p:spPr/>
+        <p:txBody>
+          <a:bodyPr/>
+          <a:lstStyle/>
+          <a:p>
+            <a:pPr lvl="0" indent="0" marL="0">
+              <a:buNone/>
+            </a:pPr>
+            <a:r>
+              <a:rPr/>
+              <a:t>For </a:t>
+            </a:r>
+            <a:r>
+              <a:rPr b="1"/>
+              <a:t>Week 7 specifically</a:t>
+            </a:r>
+            <a:r>
+              <a:rPr/>
+              <a:t>: test ADO access with a sample work item by </a:t>
+            </a:r>
+            <a:r>
+              <a:rPr b="1"/>
+              <a:t>Friday of Week 6</a:t>
+            </a:r>
+            <a:r>
+              <a:rPr/>
+              <a:t>. Don’t discover ADO issues at 09:00 Monday.</a:t>
+            </a:r>
+          </a:p>
+          <a:p>
+            <a:pPr lvl="0" indent="0" marL="0">
+              <a:buNone/>
+            </a:pPr>
+            <a:r>
+              <a:rPr/>
+              <a:t>For </a:t>
+            </a:r>
+            <a:r>
+              <a:rPr b="1"/>
+              <a:t>Week 8 specifically</a:t>
+            </a:r>
+            <a:r>
+              <a:rPr/>
+              <a:t>: confirm the post-assessment platform is active and participants can log in by </a:t>
+            </a:r>
+            <a:r>
+              <a:rPr b="1"/>
+              <a:t>Thursday of Week 7</a:t>
+            </a:r>
+            <a:r>
+              <a:rPr/>
+              <a:t>.</a:t>
+            </a:r>
+          </a:p>
+        </p:txBody>
+      </p:sp>
+    </p:spTree>
+  </p:cSld>
+</p:sld>
+</file>
+
+<file path=ppt/slides/slide2.xml><?xml version="1.0" encoding="utf-8"?>
+<p:sld xmlns:a="http://schemas.openxmlformats.org/drawingml/2006/main" xmlns:r="http://schemas.openxmlformats.org/officeDocument/2006/relationships" xmlns:p="http://schemas.openxmlformats.org/presentationml/2006/main">
+  <p:cSld>
+    <p:spTree>
+      <p:nvGrpSpPr>
+        <p:cNvPr id="1" name=""/>
+        <p:cNvGrpSpPr/>
+        <p:nvPr/>
+      </p:nvGrpSpPr>
+      <p:grpSpPr>
+        <a:xfrm>
+          <a:off x="0" y="0"/>
+          <a:ext cx="0" cy="0"/>
+          <a:chOff x="0" y="0"/>
+          <a:chExt cx="0" cy="0"/>
+        </a:xfrm>
+      </p:grpSpPr>
+      <p:sp>
+        <p:nvSpPr>
+          <p:cNvPr id="3" name="Content Placeholder 2"/>
+          <p:cNvSpPr>
+            <a:spLocks noGrp="1"/>
+          </p:cNvSpPr>
+          <p:nvPr>
+            <p:ph idx="1"/>
+          </p:nvPr>
+        </p:nvSpPr>
+        <p:spPr/>
+        <p:txBody>
+          <a:bodyPr/>
+          <a:lstStyle/>
+          <a:p>
+            <a:pPr lvl="0" indent="0" marL="0">
+              <a:buNone/>
+            </a:pPr>
+            <a:r>
+              <a:rPr i="1"/>
+              <a:t>Last updated: 2026-05-13 (rev 5)</a:t>
+            </a:r>
+          </a:p>
+          <a:p>
+            <a:pPr lvl="0" indent="0" marL="0">
+              <a:buNone/>
+            </a:pPr>
+            <a:r>
+              <a:rPr/>
+              <a:t>Practical setup guide for participants and facilitators. Cover pre-academy setup once; refer back week-by-week as new tools come into play.</a:t>
+            </a:r>
+          </a:p>
+        </p:txBody>
+      </p:sp>
+    </p:spTree>
+  </p:cSld>
+</p:sld>
+</file>
+
+<file path=ppt/slides/slide20.xml><?xml version="1.0" encoding="utf-8"?>
+<p:sld xmlns:a="http://schemas.openxmlformats.org/drawingml/2006/main" xmlns:r="http://schemas.openxmlformats.org/officeDocument/2006/relationships" xmlns:p="http://schemas.openxmlformats.org/presentationml/2006/main">
+  <p:cSld>
+    <p:spTree>
+      <p:nvGrpSpPr>
+        <p:cNvPr id="1" name=""/>
+        <p:cNvGrpSpPr/>
+        <p:nvPr/>
+      </p:nvGrpSpPr>
+      <p:grpSpPr>
+        <a:xfrm>
+          <a:off x="0" y="0"/>
+          <a:ext cx="0" cy="0"/>
+          <a:chOff x="0" y="0"/>
+          <a:chExt cx="0" cy="0"/>
+        </a:xfrm>
+      </p:grpSpPr>
+      <p:sp>
+        <p:nvSpPr>
+          <p:cNvPr id="2" name="Title 1"/>
+          <p:cNvSpPr>
+            <a:spLocks noGrp="1"/>
+          </p:cNvSpPr>
+          <p:nvPr>
+            <p:ph type="title"/>
+          </p:nvPr>
+        </p:nvSpPr>
         <p:spPr>
           <a:xfrm>
             <a:off x="457201" y="204787"/>
@@ -4384,7 +6699,7 @@
                       </a:pPr>
                       <a:r>
                         <a:rPr/>
-                        <a:t>Pair-up with a triad whose tool works; document as a constraint in the provenance log</a:t>
+                        <a:t>Pair up with a triad whose tool works; document as a constraint in the provenance log</a:t>
                       </a:r>
                     </a:p>
                   </a:txBody>
@@ -4416,7 +6731,7 @@
                       </a:pPr>
                       <a:r>
                         <a:rPr/>
-                        <a:t>Day’s AI activity becomes a </a:t>
+                        <a:t>The day’s AI activity becomes a </a:t>
                       </a:r>
                       <a:r>
                         <a:rPr b="1"/>
@@ -4464,10 +6779,119 @@
                       </a:r>
                       <a:r>
                         <a:rPr/>
-                        <a:t> — same 4-level hierarchy, same field discipline, captured in markdown. Coverage similar; hands-on practice is the loss.</a:t>
+                        <a:t> — same 4-level hierarchy, same field discipline, captured in markdown</a:t>
                       </a:r>
                     </a:p>
                   </a:txBody>
+                </a:tc>
+              </a:tr>
+            </a:tbl>
+          </a:graphicData>
+        </a:graphic>
+      </p:graphicFrame>
+    </p:spTree>
+  </p:cSld>
+</p:sld>
+</file>
+
+<file path=ppt/slides/slide21.xml><?xml version="1.0" encoding="utf-8"?>
+<p:sld xmlns:a="http://schemas.openxmlformats.org/drawingml/2006/main" xmlns:r="http://schemas.openxmlformats.org/officeDocument/2006/relationships" xmlns:p="http://schemas.openxmlformats.org/presentationml/2006/main">
+  <p:cSld>
+    <p:spTree>
+      <p:nvGrpSpPr>
+        <p:cNvPr id="1" name=""/>
+        <p:cNvGrpSpPr/>
+        <p:nvPr/>
+      </p:nvGrpSpPr>
+      <p:grpSpPr>
+        <a:xfrm>
+          <a:off x="0" y="0"/>
+          <a:ext cx="0" cy="0"/>
+          <a:chOff x="0" y="0"/>
+          <a:chExt cx="0" cy="0"/>
+        </a:xfrm>
+      </p:grpSpPr>
+      <p:sp>
+        <p:nvSpPr>
+          <p:cNvPr id="2" name="Title 1"/>
+          <p:cNvSpPr>
+            <a:spLocks noGrp="1"/>
+          </p:cNvSpPr>
+          <p:nvPr>
+            <p:ph type="title"/>
+          </p:nvPr>
+        </p:nvSpPr>
+        <p:spPr/>
+        <p:txBody>
+          <a:bodyPr/>
+          <a:lstStyle/>
+          <a:p>
+            <a:pPr lvl="0" indent="0" marL="0">
+              <a:buNone/>
+            </a:pPr>
+            <a:r>
+              <a:rPr/>
+              <a:t>6. Fallback procedures (cont.)</a:t>
+            </a:r>
+          </a:p>
+        </p:txBody>
+      </p:sp>
+      <p:graphicFrame>
+        <p:nvGraphicFramePr>
+          <p:cNvPr id="6" name="Content Placeholder 5"/>
+          <p:cNvGraphicFramePr>
+            <a:graphicFrameLocks noGrp="1"/>
+          </p:cNvGraphicFramePr>
+          <p:nvPr>
+            <p:ph idx="1"/>
+          </p:nvPr>
+        </p:nvGraphicFramePr>
+        <p:xfrm>
+          <a:off x="457200" y="1193800"/>
+          <a:ext cx="8229600" cy="3390900"/>
+        </p:xfrm>
+        <a:graphic>
+          <a:graphicData uri="http://schemas.openxmlformats.org/drawingml/2006/table">
+            <a:tbl>
+              <a:tblPr firstRow="1" bandRow="1">
+                <a:tableStyleId>{5C22544A-7EE6-4342-B048-85BDC9FD1C3A}</a:tableStyleId>
+              </a:tblPr>
+              <a:tblGrid>
+                <a:gridCol w="4114800"/>
+                <a:gridCol w="4114800"/>
+              </a:tblGrid>
+              <a:tr h="0">
+                <a:tc>
+                  <a:txBody>
+                    <a:bodyPr/>
+                    <a:lstStyle/>
+                    <a:p>
+                      <a:pPr lvl="0" indent="0" marL="0">
+                        <a:buNone/>
+                      </a:pPr>
+                      <a:r>
+                        <a:rPr/>
+                        <a:t>If this fails</a:t>
+                      </a:r>
+                    </a:p>
+                  </a:txBody>
+                  <a:tcPr/>
+                </a:tc>
+                <a:tc>
+                  <a:txBody>
+                    <a:bodyPr/>
+                    <a:lstStyle/>
+                    <a:p>
+                      <a:pPr lvl="0" indent="0" marL="0">
+                        <a:buNone/>
+                      </a:pPr>
+                      <a:r>
+                        <a:rPr/>
+                        <a:t>Do this</a:t>
+                      </a:r>
+                    </a:p>
+                  </a:txBody>
+                  <a:tcPr/>
                 </a:tc>
               </a:tr>
               <a:tr h="0">
@@ -4575,7 +6999,7 @@
 </p:sld>
 </file>
 
-<file path=ppt/slides/slide11.xml><?xml version="1.0" encoding="utf-8"?>
+<file path=ppt/slides/slide22.xml><?xml version="1.0" encoding="utf-8"?>
 <p:sld xmlns:a="http://schemas.openxmlformats.org/drawingml/2006/main" xmlns:r="http://schemas.openxmlformats.org/officeDocument/2006/relationships" xmlns:p="http://schemas.openxmlformats.org/presentationml/2006/main">
   <p:cSld>
     <p:spTree>
@@ -4622,7 +7046,7 @@
 </p:sld>
 </file>
 
-<file path=ppt/slides/slide12.xml><?xml version="1.0" encoding="utf-8"?>
+<file path=ppt/slides/slide23.xml><?xml version="1.0" encoding="utf-8"?>
 <p:sld xmlns:a="http://schemas.openxmlformats.org/drawingml/2006/main" xmlns:r="http://schemas.openxmlformats.org/officeDocument/2006/relationships" xmlns:p="http://schemas.openxmlformats.org/presentationml/2006/main">
   <p:cSld>
     <p:spTree>
@@ -4901,7 +7325,7 @@
 </p:sld>
 </file>
 
-<file path=ppt/slides/slide13.xml><?xml version="1.0" encoding="utf-8"?>
+<file path=ppt/slides/slide24.xml><?xml version="1.0" encoding="utf-8"?>
 <p:sld xmlns:a="http://schemas.openxmlformats.org/drawingml/2006/main" xmlns:r="http://schemas.openxmlformats.org/officeDocument/2006/relationships" xmlns:p="http://schemas.openxmlformats.org/presentationml/2006/main">
   <p:cSld>
     <p:spTree>
@@ -4996,7 +7420,7 @@
 </p:sld>
 </file>
 
-<file path=ppt/slides/slide14.xml><?xml version="1.0" encoding="utf-8"?>
+<file path=ppt/slides/slide25.xml><?xml version="1.0" encoding="utf-8"?>
 <p:sld xmlns:a="http://schemas.openxmlformats.org/drawingml/2006/main" xmlns:r="http://schemas.openxmlformats.org/officeDocument/2006/relationships" xmlns:p="http://schemas.openxmlformats.org/presentationml/2006/main">
   <p:cSld>
     <p:spTree>
@@ -5069,13 +7493,26 @@
             <a:pPr lvl="0"/>
             <a:r>
               <a:rPr/>
-              <a:t>Source outline: </a:t>
+              <a:t>Glossary &amp; acronyms: </a:t>
             </a:r>
             <a:r>
               <a:rPr>
                 <a:latin typeface="Courier"/>
               </a:rPr>
-              <a:t>tools/outline.pdf</a:t>
+              <a:t>GLOSSARY.md</a:t>
+            </a:r>
+          </a:p>
+          <a:p>
+            <a:pPr lvl="0"/>
+            <a:r>
+              <a:rPr/>
+              <a:t>Source outline: </a:t>
+            </a:r>
+            <a:r>
+              <a:rPr>
+                <a:latin typeface="Courier"/>
+              </a:rPr>
+              <a:t>outline.pdf</a:t>
             </a:r>
           </a:p>
           <a:p>
@@ -5115,62 +7552,6 @@
                 <a:latin typeface="Courier"/>
               </a:rPr>
               <a:t>week-XX/labs/README.md</a:t>
-            </a:r>
-          </a:p>
-        </p:txBody>
-      </p:sp>
-    </p:spTree>
-  </p:cSld>
-</p:sld>
-</file>
-
-<file path=ppt/slides/slide2.xml><?xml version="1.0" encoding="utf-8"?>
-<p:sld xmlns:a="http://schemas.openxmlformats.org/drawingml/2006/main" xmlns:r="http://schemas.openxmlformats.org/officeDocument/2006/relationships" xmlns:p="http://schemas.openxmlformats.org/presentationml/2006/main">
-  <p:cSld>
-    <p:spTree>
-      <p:nvGrpSpPr>
-        <p:cNvPr id="1" name=""/>
-        <p:cNvGrpSpPr/>
-        <p:nvPr/>
-      </p:nvGrpSpPr>
-      <p:grpSpPr>
-        <a:xfrm>
-          <a:off x="0" y="0"/>
-          <a:ext cx="0" cy="0"/>
-          <a:chOff x="0" y="0"/>
-          <a:chExt cx="0" cy="0"/>
-        </a:xfrm>
-      </p:grpSpPr>
-      <p:sp>
-        <p:nvSpPr>
-          <p:cNvPr id="3" name="Content Placeholder 2"/>
-          <p:cNvSpPr>
-            <a:spLocks noGrp="1"/>
-          </p:cNvSpPr>
-          <p:nvPr>
-            <p:ph idx="1"/>
-          </p:nvPr>
-        </p:nvSpPr>
-        <p:spPr/>
-        <p:txBody>
-          <a:bodyPr/>
-          <a:lstStyle/>
-          <a:p>
-            <a:pPr lvl="0" indent="0" marL="0">
-              <a:buNone/>
-            </a:pPr>
-            <a:r>
-              <a:rPr i="1"/>
-              <a:t>Last updated: 2026-05-13 (rev 5)</a:t>
-            </a:r>
-          </a:p>
-          <a:p>
-            <a:pPr lvl="0" indent="0" marL="0">
-              <a:buNone/>
-            </a:pPr>
-            <a:r>
-              <a:rPr/>
-              <a:t>Practical setup guide for participants and facilitators. Cover pre-academy setup once; refer back week-by-week as new tools come into play.</a:t>
             </a:r>
           </a:p>
         </p:txBody>
@@ -5822,7 +8203,7 @@
             </a:r>
             <a:r>
               <a:rPr/>
-              <a:t> (Anthropic) — free tier acceptable for the academy; paid tier preferred for longer context</a:t>
+              <a:t> (Anthropic) — free tier acceptable; paid preferred for longer context</a:t>
             </a:r>
           </a:p>
           <a:p>
@@ -5853,277 +8234,7 @@
             </a:pPr>
             <a:r>
               <a:rPr/>
-              <a:t>For Week 1 Day 1’s “Same Question, Three Models” activity, the cohort collectively needs three different tools available. Coordinate so triads have coverage.</a:t>
-            </a:r>
-          </a:p>
-          <a:p>
-            <a:pPr lvl="0" indent="0" marL="0">
-              <a:spcBef>
-                <a:spcPts val="3000"/>
-              </a:spcBef>
-              <a:buNone/>
-            </a:pPr>
-            <a:r>
-              <a:rPr b="1"/>
-              <a:t>2.2 Skills / SkillIQ platform (pre- and post-assessments)</a:t>
-            </a:r>
-          </a:p>
-          <a:p>
-            <a:pPr lvl="0"/>
-            <a:r>
-              <a:rPr/>
-              <a:t>Pre-assessment access: required before Week 1 (Product Management + Data Literacy)</a:t>
-            </a:r>
-          </a:p>
-          <a:p>
-            <a:pPr lvl="0"/>
-            <a:r>
-              <a:rPr/>
-              <a:t>Post-assessment access: required for Week 8 Day 5</a:t>
-            </a:r>
-          </a:p>
-          <a:p>
-            <a:pPr lvl="0"/>
-            <a:r>
-              <a:rPr/>
-              <a:t>Confirm participant logins work the week before academy begins</a:t>
-            </a:r>
-          </a:p>
-          <a:p>
-            <a:pPr lvl="0" indent="0" marL="0">
-              <a:spcBef>
-                <a:spcPts val="3000"/>
-              </a:spcBef>
-              <a:buNone/>
-            </a:pPr>
-            <a:r>
-              <a:rPr b="1"/>
-              <a:t>2.3 Azure DevOps (Week 7 only)</a:t>
-            </a:r>
-          </a:p>
-          <a:p>
-            <a:pPr lvl="0" indent="0" marL="0">
-              <a:buNone/>
-            </a:pPr>
-            <a:r>
-              <a:rPr/>
-              <a:t>Each triad needs one of:</a:t>
-            </a:r>
-          </a:p>
-          <a:p>
-            <a:pPr lvl="0"/>
-            <a:r>
-              <a:rPr b="1"/>
-              <a:t>Live ADO project</a:t>
-            </a:r>
-            <a:r>
-              <a:rPr/>
-              <a:t> with create-work-item permissions (preferred — sandbox if possible)</a:t>
-            </a:r>
-          </a:p>
-          <a:p>
-            <a:pPr lvl="0"/>
-            <a:r>
-              <a:rPr b="1"/>
-              <a:t>Sandbox / training ADO instance</a:t>
-            </a:r>
-            <a:r>
-              <a:rPr/>
-              <a:t> provisioned by IT</a:t>
-            </a:r>
-          </a:p>
-          <a:p>
-            <a:pPr lvl="0"/>
-            <a:r>
-              <a:rPr b="1"/>
-              <a:t>Read-only ADO access</a:t>
-            </a:r>
-            <a:r>
-              <a:rPr/>
-              <a:t> with paper-template fallback (last resort)</a:t>
-            </a:r>
-          </a:p>
-          <a:p>
-            <a:pPr lvl="0" indent="0" marL="0">
-              <a:buNone/>
-            </a:pPr>
-            <a:r>
-              <a:rPr/>
-              <a:t>If live ADO isn’t available by Week 7 Day 1, fall back to the </a:t>
-            </a:r>
-            <a:r>
-              <a:rPr b="1"/>
-              <a:t>paper-template</a:t>
-            </a:r>
-            <a:r>
-              <a:rPr/>
-              <a:t> version of Day 2’s lab — see section 6.</a:t>
-            </a:r>
-          </a:p>
-          <a:p>
-            <a:pPr lvl="0" indent="0" marL="0">
-              <a:spcBef>
-                <a:spcPts val="3000"/>
-              </a:spcBef>
-              <a:buNone/>
-            </a:pPr>
-            <a:r>
-              <a:rPr b="1"/>
-              <a:t>2.4 Document tooling</a:t>
-            </a:r>
-          </a:p>
-          <a:p>
-            <a:pPr lvl="0" indent="0" marL="0">
-              <a:buNone/>
-            </a:pPr>
-            <a:r>
-              <a:rPr/>
-              <a:t>Each triad needs a shared workspace for collaborative editing:</a:t>
-            </a:r>
-          </a:p>
-          <a:p>
-            <a:pPr lvl="0"/>
-            <a:r>
-              <a:rPr b="1"/>
-              <a:t>Confluence / SharePoint / Google Docs / Notion</a:t>
-            </a:r>
-            <a:r>
-              <a:rPr/>
-              <a:t> — pick one and use it consistently</a:t>
-            </a:r>
-          </a:p>
-          <a:p>
-            <a:pPr lvl="0"/>
-            <a:r>
-              <a:rPr/>
-              <a:t>The 5 sibling artifacts (PRD/TCD/TMD/SEP/DP) live here</a:t>
-            </a:r>
-          </a:p>
-          <a:p>
-            <a:pPr lvl="0"/>
-            <a:r>
-              <a:rPr/>
-              <a:t>Version history is required</a:t>
-            </a:r>
-          </a:p>
-          <a:p>
-            <a:pPr lvl="0" indent="0" marL="0">
-              <a:spcBef>
-                <a:spcPts val="3000"/>
-              </a:spcBef>
-              <a:buNone/>
-            </a:pPr>
-            <a:r>
-              <a:rPr b="1"/>
-              <a:t>2.5 Diagramming (Week 4–5)</a:t>
-            </a:r>
-          </a:p>
-          <a:p>
-            <a:pPr lvl="0" indent="0" marL="0">
-              <a:buNone/>
-            </a:pPr>
-            <a:r>
-              <a:rPr/>
-              <a:t>For C4 diagrams (Wk 4 Day 3) and sequence diagrams (Wk 5 Day 4):</a:t>
-            </a:r>
-          </a:p>
-          <a:p>
-            <a:pPr lvl="0"/>
-            <a:r>
-              <a:rPr b="1"/>
-              <a:t>Whiteboard + paper</a:t>
-            </a:r>
-            <a:r>
-              <a:rPr/>
-              <a:t> is fully sufficient — phone photos serve as the artifact</a:t>
-            </a:r>
-          </a:p>
-          <a:p>
-            <a:pPr lvl="0"/>
-            <a:r>
-              <a:rPr b="1"/>
-              <a:t>Miro / Lucidchart / Excalidraw / Figma</a:t>
-            </a:r>
-            <a:r>
-              <a:rPr/>
-              <a:t> if digital is preferred</a:t>
-            </a:r>
-          </a:p>
-          <a:p>
-            <a:pPr lvl="0"/>
-            <a:r>
-              <a:rPr b="1"/>
-              <a:t>Mermaid</a:t>
-            </a:r>
-            <a:r>
-              <a:rPr/>
-              <a:t> in the team’s wiki for inline-in-doc diagrams</a:t>
-            </a:r>
-          </a:p>
-          <a:p>
-            <a:pPr lvl="0" indent="0" marL="0">
-              <a:buNone/>
-            </a:pPr>
-            <a:r>
-              <a:rPr/>
-              <a:t>Don’t over-invest in tooling here; the diagrams are thinking aids, not deliverables.</a:t>
-            </a:r>
-          </a:p>
-          <a:p>
-            <a:pPr lvl="0" indent="0" marL="0">
-              <a:spcBef>
-                <a:spcPts val="3000"/>
-              </a:spcBef>
-              <a:buNone/>
-            </a:pPr>
-            <a:r>
-              <a:rPr b="1"/>
-              <a:t>2.6 Communication</a:t>
-            </a:r>
-          </a:p>
-          <a:p>
-            <a:pPr lvl="0"/>
-            <a:r>
-              <a:rPr/>
-              <a:t>A </a:t>
-            </a:r>
-            <a:r>
-              <a:rPr b="1"/>
-              <a:t>cohort channel</a:t>
-            </a:r>
-            <a:r>
-              <a:rPr/>
-              <a:t> (Slack / Teams) for asynchronous Q&amp;A and resource sharing</a:t>
-            </a:r>
-          </a:p>
-          <a:p>
-            <a:pPr lvl="0"/>
-            <a:r>
-              <a:rPr/>
-              <a:t>A </a:t>
-            </a:r>
-            <a:r>
-              <a:rPr b="1"/>
-              <a:t>triad channel</a:t>
-            </a:r>
-            <a:r>
-              <a:rPr/>
-              <a:t> per triad for daily coordination</a:t>
-            </a:r>
-          </a:p>
-          <a:p>
-            <a:pPr lvl="0"/>
-            <a:r>
-              <a:rPr/>
-              <a:t>An </a:t>
-            </a:r>
-            <a:r>
-              <a:rPr b="1"/>
-              <a:t>instructor DM thread</a:t>
-            </a:r>
-            <a:r>
-              <a:rPr/>
-              <a:t> for individual coaching</a:t>
+              <a:t>For Week 1 Day 1’s “Same Question, Three Models,” the cohort collectively needs three different tools. Coordinate so triads have coverage.</a:t>
             </a:r>
           </a:p>
         </p:txBody>
@@ -6170,7 +8281,7 @@
             </a:pPr>
             <a:r>
               <a:rPr/>
-              <a:t>3. Installations (pre-academy)</a:t>
+              <a:t>2. Accounts &amp; access — assessments</a:t>
             </a:r>
           </a:p>
         </p:txBody>
@@ -6189,15 +8300,6 @@
         <p:txBody>
           <a:bodyPr/>
           <a:lstStyle/>
-          <a:p>
-            <a:pPr lvl="0" indent="0" marL="0">
-              <a:buNone/>
-            </a:pPr>
-            <a:r>
-              <a:rPr/>
-              <a:t>Most academy tools are browser-based. Two local installs help:</a:t>
-            </a:r>
-          </a:p>
           <a:p>
             <a:pPr lvl="0" indent="0" marL="0">
               <a:spcBef>
@@ -6207,119 +8309,28 @@
             </a:pPr>
             <a:r>
               <a:rPr b="1"/>
-              <a:t>3.1 Reveal.js decks (already provided)</a:t>
-            </a:r>
-          </a:p>
-          <a:p>
-            <a:pPr lvl="0" indent="0" marL="0">
-              <a:buNone/>
-            </a:pPr>
-            <a:r>
-              <a:rPr/>
-              <a:t>The daily decks live in </a:t>
-            </a:r>
-            <a:r>
-              <a:rPr>
-                <a:latin typeface="Courier"/>
-              </a:rPr>
-              <a:t>week-XX/presentations/day-XX-*.html</a:t>
-            </a:r>
-            <a:r>
-              <a:rPr/>
-              <a:t>. They render directly in any modern browser:</a:t>
-            </a:r>
-          </a:p>
-          <a:p>
-            <a:pPr lvl="0" indent="0">
-              <a:buNone/>
-            </a:pPr>
-            <a:r>
-              <a:rPr>
-                <a:latin typeface="Courier"/>
-              </a:rPr>
-              <a:t>File → Open → week-01/presentations/day-01-ai-fundamentals-prompting.html</a:t>
-            </a:r>
-          </a:p>
-          <a:p>
-            <a:pPr lvl="0" indent="0" marL="0">
-              <a:buNone/>
-            </a:pPr>
-            <a:r>
-              <a:rPr/>
-              <a:t>No build step needed; Reveal.js loads from CDN. Press </a:t>
-            </a:r>
-            <a:r>
-              <a:rPr>
-                <a:latin typeface="Courier"/>
-              </a:rPr>
-              <a:t>S</a:t>
-            </a:r>
-            <a:r>
-              <a:rPr/>
-              <a:t> for speaker notes / clock.</a:t>
-            </a:r>
-          </a:p>
-          <a:p>
-            <a:pPr lvl="0" indent="0" marL="0">
-              <a:spcBef>
-                <a:spcPts val="3000"/>
-              </a:spcBef>
-              <a:buNone/>
-            </a:pPr>
-            <a:r>
-              <a:rPr b="1"/>
-              <a:t>3.2 Markdown editor (recommended)</a:t>
-            </a:r>
-          </a:p>
-          <a:p>
-            <a:pPr lvl="0" indent="0" marL="0">
-              <a:buNone/>
-            </a:pPr>
-            <a:r>
-              <a:rPr/>
-              <a:t>For authoring PRDs, TCDs, etc., a markdown editor with live preview is helpful:</a:t>
+              <a:t>2.2 Skills / SkillIQ platform (pre- and post-assessments)</a:t>
             </a:r>
           </a:p>
           <a:p>
             <a:pPr lvl="0"/>
             <a:r>
-              <a:rPr b="1"/>
-              <a:t>Obsidian</a:t>
-            </a:r>
-            <a:r>
-              <a:rPr/>
-              <a:t> (free) — strong cross-doc linking</a:t>
+              <a:rPr/>
+              <a:t>Pre-assessment access: required before Week 1 (Product Management + Data Literacy)</a:t>
             </a:r>
           </a:p>
           <a:p>
             <a:pPr lvl="0"/>
             <a:r>
-              <a:rPr b="1"/>
-              <a:t>VS Code</a:t>
-            </a:r>
-            <a:r>
-              <a:rPr/>
-              <a:t> + Markdown Preview Enhanced</a:t>
+              <a:rPr/>
+              <a:t>Post-assessment access: required for Week 8 Day 5</a:t>
             </a:r>
           </a:p>
           <a:p>
             <a:pPr lvl="0"/>
             <a:r>
-              <a:rPr b="1"/>
-              <a:t>Typora</a:t>
-            </a:r>
-            <a:r>
-              <a:rPr/>
-              <a:t> (paid) — minimal interface</a:t>
-            </a:r>
-          </a:p>
-          <a:p>
-            <a:pPr lvl="0" indent="0" marL="0">
-              <a:buNone/>
-            </a:pPr>
-            <a:r>
-              <a:rPr/>
-              <a:t>The labs reference markdown templates throughout; a comfortable editor pays off across all 8 weeks.</a:t>
+              <a:rPr/>
+              <a:t>Confirm participant logins work the week before academy begins</a:t>
             </a:r>
           </a:p>
         </p:txBody>
@@ -6366,7 +8377,7 @@
             </a:pPr>
             <a:r>
               <a:rPr/>
-              <a:t>4. Week-by-week additions</a:t>
+              <a:t>2. Accounts &amp; access — Azure DevOps</a:t>
             </a:r>
           </a:p>
         </p:txBody>
@@ -6394,260 +8405,66 @@
             </a:pPr>
             <a:r>
               <a:rPr b="1"/>
-              <a:t>Week 1 — Customer-Centric Foundations</a:t>
+              <a:t>2.3 Azure DevOps (Week 7 only)</a:t>
+            </a:r>
+          </a:p>
+          <a:p>
+            <a:pPr lvl="0" indent="0" marL="0">
+              <a:buNone/>
+            </a:pPr>
+            <a:r>
+              <a:rPr/>
+              <a:t>Each triad needs one of:</a:t>
             </a:r>
           </a:p>
           <a:p>
             <a:pPr lvl="0"/>
             <a:r>
-              <a:rPr/>
-              <a:t>All AI tools confirmed and working</a:t>
+              <a:rPr b="1"/>
+              <a:t>Live ADO project</a:t>
+            </a:r>
+            <a:r>
+              <a:rPr/>
+              <a:t> with create-work-item permissions (preferred — sandbox if possible)</a:t>
             </a:r>
           </a:p>
           <a:p>
             <a:pPr lvl="0"/>
             <a:r>
-              <a:rPr/>
-              <a:t>Persona Validation Canvas, Pain-Point Severity Matrix, Problem Statement Template (printed or digital — see lab packets)</a:t>
+              <a:rPr b="1"/>
+              <a:t>Sandbox / training ADO instance</a:t>
+            </a:r>
+            <a:r>
+              <a:rPr/>
+              <a:t> provisioned by IT</a:t>
+            </a:r>
+          </a:p>
+          <a:p>
+            <a:pPr lvl="0"/>
+            <a:r>
+              <a:rPr b="1"/>
+              <a:t>Read-only ADO access</a:t>
+            </a:r>
+            <a:r>
+              <a:rPr/>
+              <a:t> with paper-template fallback (last resort)</a:t>
             </a:r>
           </a:p>
           <a:p>
             <a:pPr lvl="0" indent="0" marL="0">
-              <a:spcBef>
-                <a:spcPts val="3000"/>
-              </a:spcBef>
               <a:buNone/>
             </a:pPr>
             <a:r>
+              <a:rPr/>
+              <a:t>If live ADO isn’t available by Week 7 Day 1, fall back to the </a:t>
+            </a:r>
+            <a:r>
               <a:rPr b="1"/>
-              <a:t>Week 2 — Strategic Design &amp; Metrics</a:t>
-            </a:r>
-          </a:p>
-          <a:p>
-            <a:pPr lvl="0"/>
-            <a:r>
-              <a:rPr/>
-              <a:t>Spreadsheet for Tier Sheet (Excel / Google Sheets / Numbers)</a:t>
-            </a:r>
-          </a:p>
-          <a:p>
-            <a:pPr lvl="0"/>
-            <a:r>
-              <a:rPr/>
-              <a:t>Whiteboard or A2 paper for Journey Map Canvas (Day 5)</a:t>
-            </a:r>
-          </a:p>
-          <a:p>
-            <a:pPr lvl="0" indent="0" marL="0">
-              <a:spcBef>
-                <a:spcPts val="3000"/>
-              </a:spcBef>
-              <a:buNone/>
-            </a:pPr>
-            <a:r>
-              <a:rPr b="1"/>
-              <a:t>Week 3 — Requirements Engineering &amp; Mini-Capstone</a:t>
-            </a:r>
-          </a:p>
-          <a:p>
-            <a:pPr lvl="0"/>
-            <a:r>
-              <a:rPr b="1"/>
-              <a:t>AI tools off</a:t>
-            </a:r>
-            <a:r>
-              <a:rPr/>
-              <a:t> for the week — honor system. Disable AI features in your editor.</a:t>
-            </a:r>
-          </a:p>
-          <a:p>
-            <a:pPr lvl="0"/>
-            <a:r>
-              <a:rPr/>
-              <a:t>Markdown editor for PRD drafting</a:t>
-            </a:r>
-          </a:p>
-          <a:p>
-            <a:pPr lvl="0"/>
-            <a:r>
-              <a:rPr/>
-              <a:t>Print or share digitally: PRD template (1 per triad)</a:t>
-            </a:r>
-          </a:p>
-          <a:p>
-            <a:pPr lvl="0" indent="0" marL="0">
-              <a:spcBef>
-                <a:spcPts val="3000"/>
-              </a:spcBef>
-              <a:buNone/>
-            </a:pPr>
-            <a:r>
-              <a:rPr b="1"/>
-              <a:t>Week 4 — Technical Architecture &amp; Constraints</a:t>
-            </a:r>
-          </a:p>
-          <a:p>
-            <a:pPr lvl="0"/>
-            <a:r>
-              <a:rPr/>
-              <a:t>AI tools restored</a:t>
-            </a:r>
-          </a:p>
-          <a:p>
-            <a:pPr lvl="0"/>
-            <a:r>
-              <a:rPr/>
-              <a:t>Whiteboard / Miro / Lucidchart for C4 diagrams (Day 3)</a:t>
-            </a:r>
-          </a:p>
-          <a:p>
-            <a:pPr lvl="0"/>
-            <a:r>
-              <a:rPr/>
-              <a:t>STRIDE Card handout (Day 2)</a:t>
-            </a:r>
-          </a:p>
-          <a:p>
-            <a:pPr lvl="0" indent="0" marL="0">
-              <a:spcBef>
-                <a:spcPts val="3000"/>
-              </a:spcBef>
-              <a:buNone/>
-            </a:pPr>
-            <a:r>
-              <a:rPr b="1"/>
-              <a:t>Week 5 — Technical Infrastructure &amp; Modeling</a:t>
-            </a:r>
-          </a:p>
-          <a:p>
-            <a:pPr lvl="0"/>
-            <a:r>
-              <a:rPr/>
-              <a:t>AI tools, with validation discipline</a:t>
-            </a:r>
-          </a:p>
-          <a:p>
-            <a:pPr lvl="0"/>
-            <a:r>
-              <a:rPr/>
-              <a:t>Diagramming tool for sequence diagrams (Day 4)</a:t>
-            </a:r>
-          </a:p>
-          <a:p>
-            <a:pPr lvl="0"/>
-            <a:r>
-              <a:rPr/>
-              <a:t>Reference cards for HTTP status codes, REST methods (printed or bookmarked)</a:t>
-            </a:r>
-          </a:p>
-          <a:p>
-            <a:pPr lvl="0" indent="0" marL="0">
-              <a:spcBef>
-                <a:spcPts val="3000"/>
-              </a:spcBef>
-              <a:buNone/>
-            </a:pPr>
-            <a:r>
-              <a:rPr b="1"/>
-              <a:t>Week 6 — Stakeholder Alignment &amp; Negotiation</a:t>
-            </a:r>
-          </a:p>
-          <a:p>
-            <a:pPr lvl="0"/>
-            <a:r>
-              <a:rPr/>
-              <a:t>Power × Interest grid (paper or whiteboard)</a:t>
-            </a:r>
-          </a:p>
-          <a:p>
-            <a:pPr lvl="0"/>
-            <a:r>
-              <a:rPr/>
-              <a:t>Stakeholder persona scripts (Day 5 simulation handouts) — instructor prepares ahead</a:t>
-            </a:r>
-          </a:p>
-          <a:p>
-            <a:pPr lvl="0"/>
-            <a:r>
-              <a:rPr/>
-              <a:t>Surprise objection sets (Day 5) — instructor prepares ahead</a:t>
-            </a:r>
-          </a:p>
-          <a:p>
-            <a:pPr lvl="0" indent="0" marL="0">
-              <a:spcBef>
-                <a:spcPts val="3000"/>
-              </a:spcBef>
-              <a:buNone/>
-            </a:pPr>
-            <a:r>
-              <a:rPr b="1"/>
-              <a:t>Week 7 — Agile Delivery &amp; ADO Mastery</a:t>
-            </a:r>
-          </a:p>
-          <a:p>
-            <a:pPr lvl="0"/>
-            <a:r>
-              <a:rPr b="1"/>
-              <a:t>ADO access confirmed</a:t>
-            </a:r>
-            <a:r>
-              <a:rPr/>
-              <a:t> (see 2.3 above)</a:t>
-            </a:r>
-          </a:p>
-          <a:p>
-            <a:pPr lvl="0"/>
-            <a:r>
-              <a:rPr/>
-              <a:t>ADO Cheat Sheet handout (Day 2)</a:t>
-            </a:r>
-          </a:p>
-          <a:p>
-            <a:pPr lvl="0"/>
-            <a:r>
-              <a:rPr/>
-              <a:t>VSM Canvas — large paper or whiteboard (Day 4)</a:t>
-            </a:r>
-          </a:p>
-          <a:p>
-            <a:pPr lvl="0" indent="0" marL="0">
-              <a:spcBef>
-                <a:spcPts val="3000"/>
-              </a:spcBef>
-              <a:buNone/>
-            </a:pPr>
-            <a:r>
-              <a:rPr b="1"/>
-              <a:t>Week 8 — AI Spec Development &amp; Capstone</a:t>
-            </a:r>
-          </a:p>
-          <a:p>
-            <a:pPr lvl="0"/>
-            <a:r>
-              <a:rPr/>
-              <a:t>AI tools, with validation discipline</a:t>
-            </a:r>
-          </a:p>
-          <a:p>
-            <a:pPr lvl="0"/>
-            <a:r>
-              <a:rPr/>
-              <a:t>Capstone subject inputs gathered before Day 1 (interviews / data / docs — per triad)</a:t>
-            </a:r>
-          </a:p>
-          <a:p>
-            <a:pPr lvl="0"/>
-            <a:r>
-              <a:rPr/>
-              <a:t>Presentation projector / screen sharing for Friday</a:t>
-            </a:r>
-          </a:p>
-          <a:p>
-            <a:pPr lvl="0"/>
-            <a:r>
-              <a:rPr/>
-              <a:t>Post-assessment access confirmed (Skills / SkillIQ)</a:t>
+              <a:t>paper-template</a:t>
+            </a:r>
+            <a:r>
+              <a:rPr/>
+              <a:t> version of Day 2’s lab — see section 6.</a:t>
             </a:r>
           </a:p>
         </p:txBody>
@@ -6694,7 +8511,7 @@
             </a:pPr>
             <a:r>
               <a:rPr/>
-              <a:t>5. Facilitator pre-flight checklist (per week)</a:t>
+              <a:t>2. Accounts &amp; access — document tooling</a:t>
             </a:r>
           </a:p>
         </p:txBody>
@@ -6715,101 +8532,48 @@
           <a:lstStyle/>
           <a:p>
             <a:pPr lvl="0" indent="0" marL="0">
+              <a:spcBef>
+                <a:spcPts val="3000"/>
+              </a:spcBef>
               <a:buNone/>
             </a:pPr>
             <a:r>
-              <a:rPr/>
-              <a:t>Run this checklist the </a:t>
-            </a:r>
-            <a:r>
               <a:rPr b="1"/>
-              <a:t>Friday before each week begins</a:t>
-            </a:r>
-            <a:r>
-              <a:rPr/>
-              <a:t>:</a:t>
+              <a:t>2.4 Document tooling</a:t>
+            </a:r>
+          </a:p>
+          <a:p>
+            <a:pPr lvl="0" indent="0" marL="0">
+              <a:buNone/>
+            </a:pPr>
+            <a:r>
+              <a:rPr/>
+              <a:t>Each triad needs a shared workspace for collaborative editing:</a:t>
             </a:r>
           </a:p>
           <a:p>
             <a:pPr lvl="0"/>
             <a:r>
-              <a:rPr/>
-              <a:t>☐ All participants have access to required tools (cross-check section 4)</a:t>
+              <a:rPr b="1"/>
+              <a:t>Confluence / SharePoint / Google Docs / Notion</a:t>
+            </a:r>
+            <a:r>
+              <a:rPr/>
+              <a:t> — pick one, use it consistently</a:t>
             </a:r>
           </a:p>
           <a:p>
             <a:pPr lvl="0"/>
             <a:r>
               <a:rPr/>
-              <a:t>☐ Print or digitally share the lab packet for Monday</a:t>
+              <a:t>The 5 sibling artifacts (PRD/TCD/TMD/SEP/DP) live here</a:t>
             </a:r>
           </a:p>
           <a:p>
             <a:pPr lvl="0"/>
             <a:r>
               <a:rPr/>
-              <a:t>☐ Pre-print handouts called out in each day’s </a:t>
-            </a:r>
-            <a:r>
-              <a:rPr>
-                <a:latin typeface="Courier"/>
-              </a:rPr>
-              <a:t>Facilitator pre-flight checklist</a:t>
-            </a:r>
-          </a:p>
-          <a:p>
-            <a:pPr lvl="0"/>
-            <a:r>
-              <a:rPr/>
-              <a:t>☐ Confirm any Week-specific instructor-prepared materials (Wk 6 stakeholder personas, Wk 7 ADO sandbox, etc.)</a:t>
-            </a:r>
-          </a:p>
-          <a:p>
-            <a:pPr lvl="0"/>
-            <a:r>
-              <a:rPr/>
-              <a:t>☐ Verify cohort channel and triad channels are live</a:t>
-            </a:r>
-          </a:p>
-          <a:p>
-            <a:pPr lvl="0"/>
-            <a:r>
-              <a:rPr/>
-              <a:t>☐ Verify the deck file for each day opens correctly in browser</a:t>
-            </a:r>
-          </a:p>
-          <a:p>
-            <a:pPr lvl="0" indent="0" marL="0">
-              <a:buNone/>
-            </a:pPr>
-            <a:r>
-              <a:rPr/>
-              <a:t>For </a:t>
-            </a:r>
-            <a:r>
-              <a:rPr b="1"/>
-              <a:t>Week 7 specifically</a:t>
-            </a:r>
-            <a:r>
-              <a:rPr/>
-              <a:t>: test ADO access with a sample work item by Friday Week 6. Don’t discover ADO issues at 09:00 Monday.</a:t>
-            </a:r>
-          </a:p>
-          <a:p>
-            <a:pPr lvl="0" indent="0" marL="0">
-              <a:buNone/>
-            </a:pPr>
-            <a:r>
-              <a:rPr/>
-              <a:t>For </a:t>
-            </a:r>
-            <a:r>
-              <a:rPr b="1"/>
-              <a:t>Week 8 specifically</a:t>
-            </a:r>
-            <a:r>
-              <a:rPr/>
-              <a:t>: confirm the post-assessment platform is active and participants can log in by Thursday Week 7.</a:t>
+              <a:t>Version history is required</a:t>
             </a:r>
           </a:p>
         </p:txBody>

--- a/participant-setup/presentations/ppts/TECH-SETUP.pptx
+++ b/participant-setup/presentations/ppts/TECH-SETUP.pptx
@@ -1942,7 +1942,7 @@
             </a:pPr>
             <a:r>
               <a:rPr/>
-              <a:t>Pick one workspace and hold the line. Triads that scatter artifacts across three tools lose version history — which the Week-3 review depends on.</a:t>
+              <a:t>Pick one workspace and hold the line. Quads that scatter artifacts across three tools lose version history — which the Week-3 review depends on.</a:t>
             </a:r>
           </a:p>
         </p:txBody>
@@ -2106,7 +2106,7 @@
             </a:pPr>
             <a:r>
               <a:rPr/>
-              <a:t>The triad channel matters more than it looks — triads persist through Week 3 and carry the mini-capstone. Give them a durable home on Day 1.</a:t>
+              <a:t>The quad channel matters more than it looks — quads persist through Week 3 and carry the mini-capstone. Give them a durable home on Day 1.</a:t>
             </a:r>
           </a:p>
         </p:txBody>
@@ -5440,11 +5440,11 @@
             </a:r>
             <a:r>
               <a:rPr b="1"/>
-              <a:t>triad channel</a:t>
-            </a:r>
-            <a:r>
-              <a:rPr/>
-              <a:t> per triad for daily coordination</a:t>
+              <a:t>quad channel</a:t>
+            </a:r>
+            <a:r>
+              <a:rPr/>
+              <a:t> per quad for daily coordination</a:t>
             </a:r>
           </a:p>
           <a:p>
@@ -5940,7 +5940,7 @@
             <a:pPr lvl="0"/>
             <a:r>
               <a:rPr/>
-              <a:t>Print or share digitally: PRD template (1 per triad)</a:t>
+              <a:t>Print or share digitally: PRD template (1 per quad)</a:t>
             </a:r>
           </a:p>
           <a:p>
@@ -6228,7 +6228,7 @@
             <a:pPr lvl="0"/>
             <a:r>
               <a:rPr/>
-              <a:t>Capstone subject inputs gathered before Day 1 (interviews / data / docs — per triad)</a:t>
+              <a:t>Capstone subject inputs gathered before Day 1 (interviews / data / docs — per quad)</a:t>
             </a:r>
           </a:p>
           <a:p>
@@ -6357,7 +6357,7 @@
             <a:pPr lvl="0"/>
             <a:r>
               <a:rPr/>
-              <a:t>☐ Verify cohort channel and triad channels are live</a:t>
+              <a:t>☐ Verify cohort channel and quad channels are live</a:t>
             </a:r>
           </a:p>
           <a:p>
@@ -6699,7 +6699,7 @@
                       </a:pPr>
                       <a:r>
                         <a:rPr/>
-                        <a:t>Pair up with a triad whose tool works; document as a constraint in the provenance log</a:t>
+                        <a:t>Pair up with a quad whose tool works; document as a constraint in the provenance log</a:t>
                       </a:r>
                     </a:p>
                   </a:txBody>
@@ -6739,7 +6739,7 @@
                       </a:r>
                       <a:r>
                         <a:rPr/>
-                        <a:t>: triads write the prompt, predict the output, then review when AI returns</a:t>
+                        <a:t>: quads write the prompt, predict the output, then review when AI returns</a:t>
                       </a:r>
                     </a:p>
                   </a:txBody>
@@ -6920,7 +6920,7 @@
                       </a:pPr>
                       <a:r>
                         <a:rPr/>
-                        <a:t>Triads work on paper; phone photos are the artifact</a:t>
+                        <a:t>Quads work on paper; phone photos are the artifact</a:t>
                       </a:r>
                     </a:p>
                   </a:txBody>
@@ -7172,7 +7172,7 @@
                       </a:pPr>
                       <a:r>
                         <a:rPr/>
-                        <a:t>Distribute prompts across triad members’ accounts; stagger API-heavy activities</a:t>
+                        <a:t>Distribute prompts across quad members’ accounts; stagger API-heavy activities</a:t>
                       </a:r>
                     </a:p>
                   </a:txBody>
@@ -7310,7 +7310,7 @@
                       </a:pPr>
                       <a:r>
                         <a:rPr/>
-                        <a:t>Triad channels via SMS / personal email as fallback</a:t>
+                        <a:t>Quad channels via SMS / personal email as fallback</a:t>
                       </a:r>
                     </a:p>
                   </a:txBody>
@@ -8234,7 +8234,7 @@
             </a:pPr>
             <a:r>
               <a:rPr/>
-              <a:t>For Week 1 Day 1’s “Same Question, Three Models,” the cohort collectively needs three different tools. Coordinate so triads have coverage.</a:t>
+              <a:t>For Week 1 Day 1’s “Same Question, Three Models,” the cohort collectively needs three different tools. Coordinate so quads have coverage.</a:t>
             </a:r>
           </a:p>
         </p:txBody>
@@ -8414,7 +8414,7 @@
             </a:pPr>
             <a:r>
               <a:rPr/>
-              <a:t>Each triad needs one of:</a:t>
+              <a:t>Each quad needs one of:</a:t>
             </a:r>
           </a:p>
           <a:p>
@@ -8548,7 +8548,7 @@
             </a:pPr>
             <a:r>
               <a:rPr/>
-              <a:t>Each triad needs a shared workspace for collaborative editing:</a:t>
+              <a:t>Each quad needs a shared workspace for collaborative editing:</a:t>
             </a:r>
           </a:p>
           <a:p>
